--- a/docs/Week6_Stress_Test_Summary.pptx
+++ b/docs/Week6_Stress_Test_Summary.pptx
@@ -3124,16 +3124,13 @@
           </a:bodyPr>
           <a:lstStyle/>
           <a:p>
-            <a:pPr algn="ctr">
-              <a:defRPr sz="4000" b="1">
-                <a:solidFill>
-                  <a:srgbClr val="FFFFFF"/>
-                </a:solidFill>
-                <a:latin typeface="Segoe UI"/>
-              </a:defRPr>
-            </a:pPr>
-            <a:r>
-              <a:t>BÁO CÁO TUẦN 8: STRESS TESTING</a:t>
+            <a:r>
+              <a:rPr>
+                <a:solidFill>
+                  <a:srgbClr val="FFFFFF"/>
+                </a:solidFill>
+              </a:rPr>
+              <a:t>BÁO CÁO TUẦN 6: STRESS TESTING</a:t>
             </a:r>
           </a:p>
         </p:txBody>
@@ -3203,16 +3200,13 @@
           </a:bodyPr>
           <a:lstStyle/>
           <a:p>
-            <a:pPr algn="ctr">
-              <a:defRPr sz="1800">
-                <a:solidFill>
-                  <a:srgbClr val="38BDF8"/>
-                </a:solidFill>
-                <a:latin typeface="Segoe UI"/>
-              </a:defRPr>
-            </a:pPr>
-            <a:r>
-              <a:t>Kiểm định Tính vững (Robustness Check) của Hệ thống</a:t>
+            <a:r>
+              <a:rPr>
+                <a:solidFill>
+                  <a:srgbClr val="FFFFFF"/>
+                </a:solidFill>
+              </a:rPr>
+              <a:t>Robustness Check cho Synthetic Experimentation Framework</a:t>
             </a:r>
           </a:p>
         </p:txBody>
@@ -3317,6 +3311,11 @@
               </a:defRPr>
             </a:pPr>
             <a:r>
+              <a:rPr>
+                <a:solidFill>
+                  <a:srgbClr val="FFFFFF"/>
+                </a:solidFill>
+              </a:rPr>
               <a:t>1. Tổng quan Stress Test</a:t>
             </a:r>
           </a:p>
@@ -3353,6 +3352,11 @@
               </a:defRPr>
             </a:pPr>
             <a:r>
+              <a:rPr>
+                <a:solidFill>
+                  <a:srgbClr val="FFFFFF"/>
+                </a:solidFill>
+              </a:rPr>
               <a:t>Mục tiêu và Phương pháp tiếp cận</a:t>
             </a:r>
           </a:p>
@@ -3475,6 +3479,11 @@
               </a:defRPr>
             </a:pPr>
             <a:r>
+              <a:rPr>
+                <a:solidFill>
+                  <a:srgbClr val="FFFFFF"/>
+                </a:solidFill>
+              </a:rPr>
               <a:t>GSM Promotion Experimentation • Báo cáo Chuyên môn • Data Science Team</a:t>
             </a:r>
           </a:p>
@@ -3554,6 +3563,11 @@
               </a:defRPr>
             </a:pPr>
             <a:r>
+              <a:rPr>
+                <a:solidFill>
+                  <a:srgbClr val="FFFFFF"/>
+                </a:solidFill>
+              </a:rPr>
               <a:t>Project: Uplift Modeling &amp; Causal Inference</a:t>
             </a:r>
           </a:p>
@@ -3590,6 +3604,11 @@
               </a:defRPr>
             </a:pPr>
             <a:r>
+              <a:rPr>
+                <a:solidFill>
+                  <a:srgbClr val="FFFFFF"/>
+                </a:solidFill>
+              </a:rPr>
               <a:t>01 / 06</a:t>
             </a:r>
           </a:p>
@@ -3712,6 +3731,11 @@
               </a:defRPr>
             </a:pPr>
             <a:r>
+              <a:rPr>
+                <a:solidFill>
+                  <a:srgbClr val="FFFFFF"/>
+                </a:solidFill>
+              </a:rPr>
               <a:t>Mục tiêu Kiểm định</a:t>
             </a:r>
           </a:p>
@@ -3739,35 +3763,23 @@
           </a:bodyPr>
           <a:lstStyle/>
           <a:p>
-            <a:pPr>
-              <a:spcAft>
-                <a:spcPts val="600"/>
-              </a:spcAft>
-              <a:defRPr sz="1500">
-                <a:solidFill>
-                  <a:srgbClr val="FFFFFF"/>
-                </a:solidFill>
-                <a:latin typeface="Segoe UI"/>
-              </a:defRPr>
-            </a:pPr>
-            <a:r>
-              <a:t>• Kiểm tra độ tin cậy của mô hình Causal Inference trước khi triển khai thực tế.</a:t>
-            </a:r>
-          </a:p>
-          <a:p>
-            <a:pPr>
-              <a:spcAft>
-                <a:spcPts val="600"/>
-              </a:spcAft>
-              <a:defRPr sz="1500">
-                <a:solidFill>
-                  <a:srgbClr val="FFFFFF"/>
-                </a:solidFill>
-                <a:latin typeface="Segoe UI"/>
-              </a:defRPr>
-            </a:pPr>
-            <a:r>
-              <a:t>• Đảm bảo hệ thống không bị sai lệch bởi các yếu tố ngoại cảnh hoặc quy mô dữ liệu.</a:t>
+            <a:r>
+              <a:rPr>
+                <a:solidFill>
+                  <a:srgbClr val="FFFFFF"/>
+                </a:solidFill>
+              </a:rPr>
+              <a:t>• Đánh giá robustness của causal measurement framework dưới synthetic stress scenarios.</a:t>
+            </a:r>
+          </a:p>
+          <a:p>
+            <a:r>
+              <a:rPr>
+                <a:solidFill>
+                  <a:srgbClr val="FFFFFF"/>
+                </a:solidFill>
+              </a:rPr>
+              <a:t>• Kiểm tra estimator có failure rõ ràng khi sample size, treatment ratio và noise thay đổi hay không.</a:t>
             </a:r>
           </a:p>
         </p:txBody>
@@ -3889,6 +3901,11 @@
               </a:defRPr>
             </a:pPr>
             <a:r>
+              <a:rPr>
+                <a:solidFill>
+                  <a:srgbClr val="FFFFFF"/>
+                </a:solidFill>
+              </a:rPr>
               <a:t>Phương pháp</a:t>
             </a:r>
           </a:p>
@@ -3916,35 +3933,23 @@
           </a:bodyPr>
           <a:lstStyle/>
           <a:p>
-            <a:pPr>
-              <a:spcAft>
-                <a:spcPts val="600"/>
-              </a:spcAft>
-              <a:defRPr sz="1500">
-                <a:solidFill>
-                  <a:srgbClr val="FFFFFF"/>
-                </a:solidFill>
-                <a:latin typeface="Segoe UI"/>
-              </a:defRPr>
-            </a:pPr>
-            <a:r>
-              <a:t>• Thực hiện 4 bài kiểm tra độc lập (Scalability, A/A Test, Imbalanced Ratio, Noise Injection).</a:t>
-            </a:r>
-          </a:p>
-          <a:p>
-            <a:pPr>
-              <a:spcAft>
-                <a:spcPts val="600"/>
-              </a:spcAft>
-              <a:defRPr sz="1500">
-                <a:solidFill>
-                  <a:srgbClr val="FFFFFF"/>
-                </a:solidFill>
-                <a:latin typeface="Segoe UI"/>
-              </a:defRPr>
-            </a:pPr>
-            <a:r>
-              <a:t>• Đo lường sự biến động của ATE và P-value trong từng kịch bản.</a:t>
+            <a:r>
+              <a:rPr>
+                <a:solidFill>
+                  <a:srgbClr val="FFFFFF"/>
+                </a:solidFill>
+              </a:rPr>
+              <a:t>• Thực hiện 4 bài kiểm tra: Scalability, A/A Test, Imbalanced Ratio, Noise Injection.</a:t>
+            </a:r>
+          </a:p>
+          <a:p>
+            <a:r>
+              <a:rPr>
+                <a:solidFill>
+                  <a:srgbClr val="FFFFFF"/>
+                </a:solidFill>
+              </a:rPr>
+              <a:t>• Theo dõi ATE estimate, uncertainty và false positive behavior trong từng kịch bản.</a:t>
             </a:r>
           </a:p>
         </p:txBody>
@@ -4049,6 +4054,11 @@
               </a:defRPr>
             </a:pPr>
             <a:r>
+              <a:rPr>
+                <a:solidFill>
+                  <a:srgbClr val="FFFFFF"/>
+                </a:solidFill>
+              </a:rPr>
               <a:t>2. Bài test 1: Độ Hội Tụ (Scalability)</a:t>
             </a:r>
           </a:p>
@@ -4085,6 +4095,11 @@
               </a:defRPr>
             </a:pPr>
             <a:r>
+              <a:rPr>
+                <a:solidFill>
+                  <a:srgbClr val="FFFFFF"/>
+                </a:solidFill>
+              </a:rPr>
               <a:t>Đánh giá sự ổn định khi tăng quy mô mẫu</a:t>
             </a:r>
           </a:p>
@@ -4207,6 +4222,11 @@
               </a:defRPr>
             </a:pPr>
             <a:r>
+              <a:rPr>
+                <a:solidFill>
+                  <a:srgbClr val="FFFFFF"/>
+                </a:solidFill>
+              </a:rPr>
               <a:t>GSM Promotion Experimentation • Báo cáo Chuyên môn • Data Science Team</a:t>
             </a:r>
           </a:p>
@@ -4286,6 +4306,11 @@
               </a:defRPr>
             </a:pPr>
             <a:r>
+              <a:rPr>
+                <a:solidFill>
+                  <a:srgbClr val="FFFFFF"/>
+                </a:solidFill>
+              </a:rPr>
               <a:t>Project: Uplift Modeling &amp; Causal Inference</a:t>
             </a:r>
           </a:p>
@@ -4322,6 +4347,11 @@
               </a:defRPr>
             </a:pPr>
             <a:r>
+              <a:rPr>
+                <a:solidFill>
+                  <a:srgbClr val="FFFFFF"/>
+                </a:solidFill>
+              </a:rPr>
               <a:t>02 / 06</a:t>
             </a:r>
           </a:p>
@@ -4444,6 +4474,11 @@
               </a:defRPr>
             </a:pPr>
             <a:r>
+              <a:rPr>
+                <a:solidFill>
+                  <a:srgbClr val="FFFFFF"/>
+                </a:solidFill>
+              </a:rPr>
               <a:t>Thiết lập</a:t>
             </a:r>
           </a:p>
@@ -4483,6 +4518,11 @@
               </a:defRPr>
             </a:pPr>
             <a:r>
+              <a:rPr>
+                <a:solidFill>
+                  <a:srgbClr val="FFFFFF"/>
+                </a:solidFill>
+              </a:rPr>
               <a:t>• Tăng dần kích thước mẫu (Sample Size) từ 10,000 lên hàng trăm ngàn quan sát.</a:t>
             </a:r>
           </a:p>
@@ -4605,6 +4645,11 @@
               </a:defRPr>
             </a:pPr>
             <a:r>
+              <a:rPr>
+                <a:solidFill>
+                  <a:srgbClr val="FFFFFF"/>
+                </a:solidFill>
+              </a:rPr>
               <a:t>Kết quả</a:t>
             </a:r>
           </a:p>
@@ -4632,35 +4677,23 @@
           </a:bodyPr>
           <a:lstStyle/>
           <a:p>
-            <a:pPr>
-              <a:spcAft>
-                <a:spcPts val="400"/>
-              </a:spcAft>
-              <a:defRPr sz="1400">
-                <a:solidFill>
-                  <a:srgbClr val="FFFFFF"/>
-                </a:solidFill>
-                <a:latin typeface="Segoe UI"/>
-              </a:defRPr>
-            </a:pPr>
-            <a:r>
-              <a:t>• Estimated ATE bám sát True ATE.</a:t>
-            </a:r>
-          </a:p>
-          <a:p>
-            <a:pPr>
-              <a:spcAft>
-                <a:spcPts val="400"/>
-              </a:spcAft>
-              <a:defRPr sz="1400">
-                <a:solidFill>
-                  <a:srgbClr val="FFFFFF"/>
-                </a:solidFill>
-                <a:latin typeface="Segoe UI"/>
-              </a:defRPr>
-            </a:pPr>
-            <a:r>
-              <a:t>• Khoảng tin cậy (95% CI) thu hẹp dần theo đúng định lý giới hạn trung tâm.</a:t>
+            <a:r>
+              <a:rPr>
+                <a:solidFill>
+                  <a:srgbClr val="FFFFFF"/>
+                </a:solidFill>
+              </a:rPr>
+              <a:t>• Estimated ATE centered quanh synthetic benchmark trong các scenario đã kiểm tra.</a:t>
+            </a:r>
+          </a:p>
+          <a:p>
+            <a:r>
+              <a:rPr>
+                <a:solidFill>
+                  <a:srgbClr val="FFFFFF"/>
+                </a:solidFill>
+              </a:rPr>
+              <a:t>• Khoảng tin cậy 95% hẹp dần, phù hợp expected sampling behavior khi sample size tăng.</a:t>
             </a:r>
           </a:p>
         </p:txBody>
@@ -4789,6 +4822,11 @@
               </a:defRPr>
             </a:pPr>
             <a:r>
+              <a:rPr>
+                <a:solidFill>
+                  <a:srgbClr val="FFFFFF"/>
+                </a:solidFill>
+              </a:rPr>
               <a:t>3. Bài test 2: A/A Test (Giả dược)</a:t>
             </a:r>
           </a:p>
@@ -4825,6 +4863,11 @@
               </a:defRPr>
             </a:pPr>
             <a:r>
+              <a:rPr>
+                <a:solidFill>
+                  <a:srgbClr val="FFFFFF"/>
+                </a:solidFill>
+              </a:rPr>
               <a:t>Kiểm định tỷ lệ Dương tính giả (False Positives)</a:t>
             </a:r>
           </a:p>
@@ -4947,6 +4990,11 @@
               </a:defRPr>
             </a:pPr>
             <a:r>
+              <a:rPr>
+                <a:solidFill>
+                  <a:srgbClr val="FFFFFF"/>
+                </a:solidFill>
+              </a:rPr>
               <a:t>GSM Promotion Experimentation • Báo cáo Chuyên môn • Data Science Team</a:t>
             </a:r>
           </a:p>
@@ -5026,6 +5074,11 @@
               </a:defRPr>
             </a:pPr>
             <a:r>
+              <a:rPr>
+                <a:solidFill>
+                  <a:srgbClr val="FFFFFF"/>
+                </a:solidFill>
+              </a:rPr>
               <a:t>Project: Uplift Modeling &amp; Causal Inference</a:t>
             </a:r>
           </a:p>
@@ -5062,6 +5115,11 @@
               </a:defRPr>
             </a:pPr>
             <a:r>
+              <a:rPr>
+                <a:solidFill>
+                  <a:srgbClr val="FFFFFF"/>
+                </a:solidFill>
+              </a:rPr>
               <a:t>03 / 06</a:t>
             </a:r>
           </a:p>
@@ -5184,6 +5242,11 @@
               </a:defRPr>
             </a:pPr>
             <a:r>
+              <a:rPr>
+                <a:solidFill>
+                  <a:srgbClr val="FFFFFF"/>
+                </a:solidFill>
+              </a:rPr>
               <a:t>Thiết lập Kịch bản</a:t>
             </a:r>
           </a:p>
@@ -5223,6 +5286,11 @@
               </a:defRPr>
             </a:pPr>
             <a:r>
+              <a:rPr>
+                <a:solidFill>
+                  <a:srgbClr val="FFFFFF"/>
+                </a:solidFill>
+              </a:rPr>
               <a:t>• Giả lập tình huống Voucher không có bất kỳ tác động nào (True Effect = 0).</a:t>
             </a:r>
           </a:p>
@@ -5239,6 +5307,11 @@
               </a:defRPr>
             </a:pPr>
             <a:r>
+              <a:rPr>
+                <a:solidFill>
+                  <a:srgbClr val="FFFFFF"/>
+                </a:solidFill>
+              </a:rPr>
               <a:t>• Chia ngẫu nhiên tập khách hàng làm 2 nhóm và so sánh.</a:t>
             </a:r>
           </a:p>
@@ -5361,6 +5434,11 @@
               </a:defRPr>
             </a:pPr>
             <a:r>
+              <a:rPr>
+                <a:solidFill>
+                  <a:srgbClr val="FFFFFF"/>
+                </a:solidFill>
+              </a:rPr>
               <a:t>Kết quả Đo lường</a:t>
             </a:r>
           </a:p>
@@ -5388,35 +5466,33 @@
           </a:bodyPr>
           <a:lstStyle/>
           <a:p>
-            <a:pPr>
-              <a:spcAft>
-                <a:spcPts val="600"/>
-              </a:spcAft>
-              <a:defRPr sz="1500">
-                <a:solidFill>
-                  <a:srgbClr val="FFFFFF"/>
-                </a:solidFill>
-                <a:latin typeface="Segoe UI"/>
-              </a:defRPr>
-            </a:pPr>
-            <a:r>
-              <a:t>• P-value duy trì ở mức &gt; 0.05.</a:t>
-            </a:r>
-          </a:p>
-          <a:p>
-            <a:pPr>
-              <a:spcAft>
-                <a:spcPts val="600"/>
-              </a:spcAft>
-              <a:defRPr sz="1500">
-                <a:solidFill>
-                  <a:srgbClr val="FFFFFF"/>
-                </a:solidFill>
-                <a:latin typeface="Segoe UI"/>
-              </a:defRPr>
-            </a:pPr>
-            <a:r>
-              <a:t>• Hệ thống kết luận chính xác không có sự khác biệt có ý nghĩa thống kê.</a:t>
+            <a:r>
+              <a:rPr>
+                <a:solidFill>
+                  <a:srgbClr val="FFFFFF"/>
+                </a:solidFill>
+              </a:rPr>
+              <a:t>• 5,000 A/A simulations.</a:t>
+            </a:r>
+          </a:p>
+          <a:p>
+            <a:r>
+              <a:rPr>
+                <a:solidFill>
+                  <a:srgbClr val="FFFFFF"/>
+                </a:solidFill>
+              </a:rPr>
+              <a:t>• Empirical FPR ≈ 5.08%, gần mức alpha 5%.</a:t>
+            </a:r>
+          </a:p>
+          <a:p>
+            <a:r>
+              <a:rPr>
+                <a:solidFill>
+                  <a:srgbClr val="FFFFFF"/>
+                </a:solidFill>
+              </a:rPr>
+              <a:t>• Không phát hiện calibration issue đáng kể trong settings đã kiểm tra.</a:t>
             </a:r>
           </a:p>
         </p:txBody>
@@ -5538,6 +5614,11 @@
               </a:defRPr>
             </a:pPr>
             <a:r>
+              <a:rPr>
+                <a:solidFill>
+                  <a:srgbClr val="FFFFFF"/>
+                </a:solidFill>
+              </a:rPr>
               <a:t>Đánh giá</a:t>
             </a:r>
           </a:p>
@@ -5565,35 +5646,23 @@
           </a:bodyPr>
           <a:lstStyle/>
           <a:p>
-            <a:pPr>
-              <a:spcAft>
-                <a:spcPts val="600"/>
-              </a:spcAft>
-              <a:defRPr sz="1500">
-                <a:solidFill>
-                  <a:srgbClr val="FFFFFF"/>
-                </a:solidFill>
-                <a:latin typeface="Segoe UI"/>
-              </a:defRPr>
-            </a:pPr>
-            <a:r>
-              <a:t>• Mô hình không bị "ảo giác" số liệu.</a:t>
-            </a:r>
-          </a:p>
-          <a:p>
-            <a:pPr>
-              <a:spcAft>
-                <a:spcPts val="600"/>
-              </a:spcAft>
-              <a:defRPr sz="1500">
-                <a:solidFill>
-                  <a:srgbClr val="FFFFFF"/>
-                </a:solidFill>
-                <a:latin typeface="Segoe UI"/>
-              </a:defRPr>
-            </a:pPr>
-            <a:r>
-              <a:t>• Loại trừ rủi ro phân bổ ngân sách sai lầm do lỗi nhiễu ngẫu nhiên.</a:t>
+            <a:r>
+              <a:rPr>
+                <a:solidFill>
+                  <a:srgbClr val="FFFFFF"/>
+                </a:solidFill>
+              </a:rPr>
+              <a:t>• A/A test giúp kiểm tra false positive behavior trước khi đọc A/B effect.</a:t>
+            </a:r>
+          </a:p>
+          <a:p>
+            <a:r>
+              <a:rPr>
+                <a:solidFill>
+                  <a:srgbClr val="FFFFFF"/>
+                </a:solidFill>
+              </a:rPr>
+              <a:t>• Kết quả chỉ xác nhận trong synthetic scenarios đã kiểm tra.</a:t>
             </a:r>
           </a:p>
         </p:txBody>
@@ -5698,6 +5767,11 @@
               </a:defRPr>
             </a:pPr>
             <a:r>
+              <a:rPr>
+                <a:solidFill>
+                  <a:srgbClr val="FFFFFF"/>
+                </a:solidFill>
+              </a:rPr>
               <a:t>4. Bài test 3: Tỷ lệ Lệch Mẫu</a:t>
             </a:r>
           </a:p>
@@ -5734,6 +5808,11 @@
               </a:defRPr>
             </a:pPr>
             <a:r>
+              <a:rPr>
+                <a:solidFill>
+                  <a:srgbClr val="FFFFFF"/>
+                </a:solidFill>
+              </a:rPr>
               <a:t>Đánh giá sức chịu đựng với kích thước mẫu nhỏ</a:t>
             </a:r>
           </a:p>
@@ -5856,6 +5935,11 @@
               </a:defRPr>
             </a:pPr>
             <a:r>
+              <a:rPr>
+                <a:solidFill>
+                  <a:srgbClr val="FFFFFF"/>
+                </a:solidFill>
+              </a:rPr>
               <a:t>GSM Promotion Experimentation • Báo cáo Chuyên môn • Data Science Team</a:t>
             </a:r>
           </a:p>
@@ -5935,6 +6019,11 @@
               </a:defRPr>
             </a:pPr>
             <a:r>
+              <a:rPr>
+                <a:solidFill>
+                  <a:srgbClr val="FFFFFF"/>
+                </a:solidFill>
+              </a:rPr>
               <a:t>Project: Uplift Modeling &amp; Causal Inference</a:t>
             </a:r>
           </a:p>
@@ -5971,6 +6060,11 @@
               </a:defRPr>
             </a:pPr>
             <a:r>
+              <a:rPr>
+                <a:solidFill>
+                  <a:srgbClr val="FFFFFF"/>
+                </a:solidFill>
+              </a:rPr>
               <a:t>04 / 06</a:t>
             </a:r>
           </a:p>
@@ -6093,6 +6187,11 @@
               </a:defRPr>
             </a:pPr>
             <a:r>
+              <a:rPr>
+                <a:solidFill>
+                  <a:srgbClr val="FFFFFF"/>
+                </a:solidFill>
+              </a:rPr>
               <a:t>Thiết lập Kịch bản</a:t>
             </a:r>
           </a:p>
@@ -6132,6 +6231,11 @@
               </a:defRPr>
             </a:pPr>
             <a:r>
+              <a:rPr>
+                <a:solidFill>
+                  <a:srgbClr val="FFFFFF"/>
+                </a:solidFill>
+              </a:rPr>
               <a:t>• Giả định ngân sách giới hạn, buộc phải ép tỷ lệ chia mẫu Control/Treatment xuống mức 90/10.</a:t>
             </a:r>
           </a:p>
@@ -6254,6 +6358,11 @@
               </a:defRPr>
             </a:pPr>
             <a:r>
+              <a:rPr>
+                <a:solidFill>
+                  <a:srgbClr val="FFFFFF"/>
+                </a:solidFill>
+              </a:rPr>
               <a:t>Kết quả Đo lường</a:t>
             </a:r>
           </a:p>
@@ -6293,6 +6402,11 @@
               </a:defRPr>
             </a:pPr>
             <a:r>
+              <a:rPr>
+                <a:solidFill>
+                  <a:srgbClr val="FFFFFF"/>
+                </a:solidFill>
+              </a:rPr>
               <a:t>• Phương sai (Variance) tăng do mẫu Treatment mỏng đi.</a:t>
             </a:r>
           </a:p>
@@ -6309,6 +6423,11 @@
               </a:defRPr>
             </a:pPr>
             <a:r>
+              <a:rPr>
+                <a:solidFill>
+                  <a:srgbClr val="FFFFFF"/>
+                </a:solidFill>
+              </a:rPr>
               <a:t>• Tuy nhiên, giá trị ATE ước lượng vẫn xoay quanh ATE thực tế.</a:t>
             </a:r>
           </a:p>
@@ -6431,6 +6550,11 @@
               </a:defRPr>
             </a:pPr>
             <a:r>
+              <a:rPr>
+                <a:solidFill>
+                  <a:srgbClr val="FFFFFF"/>
+                </a:solidFill>
+              </a:rPr>
               <a:t>Đánh giá</a:t>
             </a:r>
           </a:p>
@@ -6458,19 +6582,23 @@
           </a:bodyPr>
           <a:lstStyle/>
           <a:p>
-            <a:pPr>
-              <a:spcAft>
-                <a:spcPts val="600"/>
-              </a:spcAft>
-              <a:defRPr sz="1500">
-                <a:solidFill>
-                  <a:srgbClr val="FFFFFF"/>
-                </a:solidFill>
-                <a:latin typeface="Segoe UI"/>
-              </a:defRPr>
-            </a:pPr>
-            <a:r>
-              <a:t>• Mô hình vẫn hoạt động ổn định ngay cả khi điều kiện thử nghiệm không lý tưởng (không thể chia 50/50).</a:t>
+            <a:r>
+              <a:rPr>
+                <a:solidFill>
+                  <a:srgbClr val="FFFFFF"/>
+                </a:solidFill>
+              </a:rPr>
+              <a:t>• ATE estimate vẫn centered quanh benchmark trong scenario đã kiểm tra, nhưng variance/CI tăng đáng kể.</a:t>
+            </a:r>
+          </a:p>
+          <a:p>
+            <a:r>
+              <a:rPr>
+                <a:solidFill>
+                  <a:srgbClr val="FFFFFF"/>
+                </a:solidFill>
+              </a:rPr>
+              <a:t>• Imbalanced design cần cân nhắc power và sample size.</a:t>
             </a:r>
           </a:p>
         </p:txBody>
@@ -6575,6 +6703,11 @@
               </a:defRPr>
             </a:pPr>
             <a:r>
+              <a:rPr>
+                <a:solidFill>
+                  <a:srgbClr val="FFFFFF"/>
+                </a:solidFill>
+              </a:rPr>
               <a:t>5. Bài test 4: Kháng Nhiễu (Noise)</a:t>
             </a:r>
           </a:p>
@@ -6611,6 +6744,11 @@
               </a:defRPr>
             </a:pPr>
             <a:r>
+              <a:rPr>
+                <a:solidFill>
+                  <a:srgbClr val="FFFFFF"/>
+                </a:solidFill>
+              </a:rPr>
               <a:t>Kiểm tra độ vững trước tác động ngoại cảnh</a:t>
             </a:r>
           </a:p>
@@ -6733,6 +6871,11 @@
               </a:defRPr>
             </a:pPr>
             <a:r>
+              <a:rPr>
+                <a:solidFill>
+                  <a:srgbClr val="FFFFFF"/>
+                </a:solidFill>
+              </a:rPr>
               <a:t>GSM Promotion Experimentation • Báo cáo Chuyên môn • Data Science Team</a:t>
             </a:r>
           </a:p>
@@ -6812,6 +6955,11 @@
               </a:defRPr>
             </a:pPr>
             <a:r>
+              <a:rPr>
+                <a:solidFill>
+                  <a:srgbClr val="FFFFFF"/>
+                </a:solidFill>
+              </a:rPr>
               <a:t>Project: Uplift Modeling &amp; Causal Inference</a:t>
             </a:r>
           </a:p>
@@ -6848,6 +6996,11 @@
               </a:defRPr>
             </a:pPr>
             <a:r>
+              <a:rPr>
+                <a:solidFill>
+                  <a:srgbClr val="FFFFFF"/>
+                </a:solidFill>
+              </a:rPr>
               <a:t>05 / 06</a:t>
             </a:r>
           </a:p>
@@ -6970,6 +7123,11 @@
               </a:defRPr>
             </a:pPr>
             <a:r>
+              <a:rPr>
+                <a:solidFill>
+                  <a:srgbClr val="FFFFFF"/>
+                </a:solidFill>
+              </a:rPr>
               <a:t>Thiết lập Kịch bản</a:t>
             </a:r>
           </a:p>
@@ -6997,35 +7155,23 @@
           </a:bodyPr>
           <a:lstStyle/>
           <a:p>
-            <a:pPr>
-              <a:spcAft>
-                <a:spcPts val="600"/>
-              </a:spcAft>
-              <a:defRPr sz="1500">
-                <a:solidFill>
-                  <a:srgbClr val="FFFFFF"/>
-                </a:solidFill>
-                <a:latin typeface="Segoe UI"/>
-              </a:defRPr>
-            </a:pPr>
-            <a:r>
-              <a:t>• Tiêm nhiễu ngẫu nhiên (Gaussian Noise) vào biến mục tiêu (Số chuyến đi).</a:t>
-            </a:r>
-          </a:p>
-          <a:p>
-            <a:pPr>
-              <a:spcAft>
-                <a:spcPts val="600"/>
-              </a:spcAft>
-              <a:defRPr sz="1500">
-                <a:solidFill>
-                  <a:srgbClr val="FFFFFF"/>
-                </a:solidFill>
-                <a:latin typeface="Segoe UI"/>
-              </a:defRPr>
-            </a:pPr>
-            <a:r>
-              <a:t>• Mô phỏng tác động của các sự kiện bất thường (ví dụ: thời tiết xấu, lễ hội).</a:t>
+            <a:r>
+              <a:rPr>
+                <a:solidFill>
+                  <a:srgbClr val="FFFFFF"/>
+                </a:solidFill>
+              </a:rPr>
+              <a:t>• Tiêm mean-zero Gaussian noise vào outcome như simplified stress scenario.</a:t>
+            </a:r>
+          </a:p>
+          <a:p>
+            <a:r>
+              <a:rPr>
+                <a:solidFill>
+                  <a:srgbClr val="FFFFFF"/>
+                </a:solidFill>
+              </a:rPr>
+              <a:t>• Real-world shocks như thời tiết/lễ hội có thể là systematic factors.</a:t>
             </a:r>
           </a:p>
         </p:txBody>
@@ -7147,6 +7293,11 @@
               </a:defRPr>
             </a:pPr>
             <a:r>
+              <a:rPr>
+                <a:solidFill>
+                  <a:srgbClr val="FFFFFF"/>
+                </a:solidFill>
+              </a:rPr>
               <a:t>Kết quả Đo lường</a:t>
             </a:r>
           </a:p>
@@ -7174,35 +7325,23 @@
           </a:bodyPr>
           <a:lstStyle/>
           <a:p>
-            <a:pPr>
-              <a:spcAft>
-                <a:spcPts val="600"/>
-              </a:spcAft>
-              <a:defRPr sz="1500">
-                <a:solidFill>
-                  <a:srgbClr val="FFFFFF"/>
-                </a:solidFill>
-                <a:latin typeface="Segoe UI"/>
-              </a:defRPr>
-            </a:pPr>
-            <a:r>
-              <a:t>• Phân phối số chuyến đi bị biến dạng mạnh.</a:t>
-            </a:r>
-          </a:p>
-          <a:p>
-            <a:pPr>
-              <a:spcAft>
-                <a:spcPts val="600"/>
-              </a:spcAft>
-              <a:defRPr sz="1500">
-                <a:solidFill>
-                  <a:srgbClr val="FFFFFF"/>
-                </a:solidFill>
-                <a:latin typeface="Segoe UI"/>
-              </a:defRPr>
-            </a:pPr>
-            <a:r>
-              <a:t>• Tuy nhiên, chênh lệch ATE giữa 2 nhóm T và C gần như không thay đổi.</a:t>
+            <a:r>
+              <a:rPr>
+                <a:solidFill>
+                  <a:srgbClr val="FFFFFF"/>
+                </a:solidFill>
+              </a:rPr>
+              <a:t>• Noise làm tăng biến động outcome.</a:t>
+            </a:r>
+          </a:p>
+          <a:p>
+            <a:r>
+              <a:rPr>
+                <a:solidFill>
+                  <a:srgbClr val="FFFFFF"/>
+                </a:solidFill>
+              </a:rPr>
+              <a:t>• ATE difference vẫn tương đối ổn trong scenario đã kiểm tra, nhưng uncertainty tăng.</a:t>
             </a:r>
           </a:p>
         </p:txBody>
@@ -7324,6 +7463,11 @@
               </a:defRPr>
             </a:pPr>
             <a:r>
+              <a:rPr>
+                <a:solidFill>
+                  <a:srgbClr val="FFFFFF"/>
+                </a:solidFill>
+              </a:rPr>
               <a:t>Cơ sở Toán học</a:t>
             </a:r>
           </a:p>
@@ -7351,35 +7495,23 @@
           </a:bodyPr>
           <a:lstStyle/>
           <a:p>
-            <a:pPr>
-              <a:spcAft>
-                <a:spcPts val="600"/>
-              </a:spcAft>
-              <a:defRPr sz="1500">
-                <a:solidFill>
-                  <a:srgbClr val="FFFFFF"/>
-                </a:solidFill>
-                <a:latin typeface="Segoe UI"/>
-              </a:defRPr>
-            </a:pPr>
-            <a:r>
-              <a:t>• Quá trình phân bổ ngẫu nhiên (Randomization) phân phối đều nhiễu lên cả 2 nhóm.</a:t>
-            </a:r>
-          </a:p>
-          <a:p>
-            <a:pPr>
-              <a:spcAft>
-                <a:spcPts val="600"/>
-              </a:spcAft>
-              <a:defRPr sz="1500">
-                <a:solidFill>
-                  <a:srgbClr val="FFFFFF"/>
-                </a:solidFill>
-                <a:latin typeface="Segoe UI"/>
-              </a:defRPr>
-            </a:pPr>
-            <a:r>
-              <a:t>• Khi tính toán ATE (T trừ C), lượng nhiễu này tự triệt tiêu.</a:t>
+            <a:r>
+              <a:rPr>
+                <a:solidFill>
+                  <a:srgbClr val="FFFFFF"/>
+                </a:solidFill>
+              </a:rPr>
+              <a:t>• Với mean-zero noise độc lập với treatment, randomization giúp cân bằng noise theo kỳ vọng.</a:t>
+            </a:r>
+          </a:p>
+          <a:p>
+            <a:r>
+              <a:rPr>
+                <a:solidFill>
+                  <a:srgbClr val="FFFFFF"/>
+                </a:solidFill>
+              </a:rPr>
+              <a:t>• Noise không biến mất hoàn toàn; nó làm tăng variance và CI.</a:t>
             </a:r>
           </a:p>
         </p:txBody>
@@ -7475,16 +7607,13 @@
           </a:bodyPr>
           <a:lstStyle/>
           <a:p>
-            <a:pPr>
-              <a:defRPr sz="2600" b="1">
-                <a:solidFill>
-                  <a:srgbClr val="FFFFFF"/>
-                </a:solidFill>
-                <a:latin typeface="Segoe UI"/>
-              </a:defRPr>
-            </a:pPr>
-            <a:r>
-              <a:t>6. Tổng kết &amp; Đề xuất Triển khai</a:t>
+            <a:r>
+              <a:rPr>
+                <a:solidFill>
+                  <a:srgbClr val="FFFFFF"/>
+                </a:solidFill>
+              </a:rPr>
+              <a:t>6. Tổng kết Robustness &amp; Next Validation</a:t>
             </a:r>
           </a:p>
         </p:txBody>
@@ -7511,16 +7640,13 @@
           </a:bodyPr>
           <a:lstStyle/>
           <a:p>
-            <a:pPr>
-              <a:defRPr sz="1300">
-                <a:solidFill>
-                  <a:srgbClr val="FFB800"/>
-                </a:solidFill>
-                <a:latin typeface="Segoe UI"/>
-              </a:defRPr>
-            </a:pPr>
-            <a:r>
-              <a:t>Đánh giá mức độ sẵn sàng của hệ thống</a:t>
+            <a:r>
+              <a:rPr>
+                <a:solidFill>
+                  <a:srgbClr val="FFFFFF"/>
+                </a:solidFill>
+              </a:rPr>
+              <a:t>Synthetic checks trước khi chuyển sang real data</a:t>
             </a:r>
           </a:p>
         </p:txBody>
@@ -7642,6 +7768,11 @@
               </a:defRPr>
             </a:pPr>
             <a:r>
+              <a:rPr>
+                <a:solidFill>
+                  <a:srgbClr val="FFFFFF"/>
+                </a:solidFill>
+              </a:rPr>
               <a:t>GSM Promotion Experimentation • Báo cáo Chuyên môn • Data Science Team</a:t>
             </a:r>
           </a:p>
@@ -7721,6 +7852,11 @@
               </a:defRPr>
             </a:pPr>
             <a:r>
+              <a:rPr>
+                <a:solidFill>
+                  <a:srgbClr val="FFFFFF"/>
+                </a:solidFill>
+              </a:rPr>
               <a:t>Project: Uplift Modeling &amp; Causal Inference</a:t>
             </a:r>
           </a:p>
@@ -7757,6 +7893,11 @@
               </a:defRPr>
             </a:pPr>
             <a:r>
+              <a:rPr>
+                <a:solidFill>
+                  <a:srgbClr val="FFFFFF"/>
+                </a:solidFill>
+              </a:rPr>
               <a:t>06 / 06</a:t>
             </a:r>
           </a:p>
@@ -7879,6 +8020,11 @@
               </a:defRPr>
             </a:pPr>
             <a:r>
+              <a:rPr>
+                <a:solidFill>
+                  <a:srgbClr val="FFFFFF"/>
+                </a:solidFill>
+              </a:rPr>
               <a:t>Đánh giá Tính vững (Robustness)</a:t>
             </a:r>
           </a:p>
@@ -7906,19 +8052,13 @@
           </a:bodyPr>
           <a:lstStyle/>
           <a:p>
-            <a:pPr>
-              <a:spcAft>
-                <a:spcPts val="600"/>
-              </a:spcAft>
-              <a:defRPr sz="1500">
-                <a:solidFill>
-                  <a:srgbClr val="FFFFFF"/>
-                </a:solidFill>
-                <a:latin typeface="Segoe UI"/>
-              </a:defRPr>
-            </a:pPr>
-            <a:r>
-              <a:t>• Hệ thống đo lường Causal Inference duy trì tính chính xác qua cả 4 kịch bản Stress Test tiêu chuẩn.</a:t>
+            <a:r>
+              <a:rPr>
+                <a:solidFill>
+                  <a:srgbClr val="FFFFFF"/>
+                </a:solidFill>
+              </a:rPr>
+              <a:t>• Không phát hiện failure nghiêm trọng trong 4 synthetic stress scenarios đã kiểm tra.</a:t>
             </a:r>
           </a:p>
         </p:txBody>
@@ -8040,6 +8180,11 @@
               </a:defRPr>
             </a:pPr>
             <a:r>
+              <a:rPr>
+                <a:solidFill>
+                  <a:srgbClr val="FFFFFF"/>
+                </a:solidFill>
+              </a:rPr>
               <a:t>Khuyến nghị Triển khai</a:t>
             </a:r>
           </a:p>
@@ -8067,35 +8212,23 @@
           </a:bodyPr>
           <a:lstStyle/>
           <a:p>
-            <a:pPr>
-              <a:spcAft>
-                <a:spcPts val="600"/>
-              </a:spcAft>
-              <a:defRPr sz="1500">
-                <a:solidFill>
-                  <a:srgbClr val="FFFFFF"/>
-                </a:solidFill>
-                <a:latin typeface="Segoe UI"/>
-              </a:defRPr>
-            </a:pPr>
-            <a:r>
-              <a:t>• Đạt tiêu chuẩn kỹ thuật để tích hợp vào Pipeline dữ liệu thực tế.</a:t>
-            </a:r>
-          </a:p>
-          <a:p>
-            <a:pPr>
-              <a:spcAft>
-                <a:spcPts val="600"/>
-              </a:spcAft>
-              <a:defRPr sz="1500">
-                <a:solidFill>
-                  <a:srgbClr val="FFFFFF"/>
-                </a:solidFill>
-                <a:latin typeface="Segoe UI"/>
-              </a:defRPr>
-            </a:pPr>
-            <a:r>
-              <a:t>• Sẵn sàng triển khai A/B Testing trên quy mô lớn.</a:t>
+            <a:r>
+              <a:rPr>
+                <a:solidFill>
+                  <a:srgbClr val="FFFFFF"/>
+                </a:solidFill>
+              </a:rPr>
+              <a:t>• Stress tests chưa bao phủ production risks như logging/exposure failure, interference và distribution shift.</a:t>
+            </a:r>
+          </a:p>
+          <a:p>
+            <a:r>
+              <a:rPr>
+                <a:solidFill>
+                  <a:srgbClr val="FFFFFF"/>
+                </a:solidFill>
+              </a:rPr>
+              <a:t>• Real-world use cần randomized production experiment và monitoring.</a:t>
             </a:r>
           </a:p>
         </p:txBody>

--- a/docs/Week6_Stress_Test_Summary.pptx
+++ b/docs/Week6_Stress_Test_Summary.pptx
@@ -5,13 +5,13 @@
     <p:sldMasterId id="2147483648" r:id="rId1"/>
   </p:sldMasterIdLst>
   <p:sldIdLst>
-    <p:sldId id="256" r:id="rId7"/>
-    <p:sldId id="257" r:id="rId8"/>
-    <p:sldId id="258" r:id="rId9"/>
-    <p:sldId id="259" r:id="rId10"/>
-    <p:sldId id="260" r:id="rId11"/>
-    <p:sldId id="261" r:id="rId12"/>
-    <p:sldId id="262" r:id="rId13"/>
+    <p:sldId id="256" r:id="rId2"/>
+    <p:sldId id="257" r:id="rId3"/>
+    <p:sldId id="258" r:id="rId4"/>
+    <p:sldId id="259" r:id="rId5"/>
+    <p:sldId id="260" r:id="rId6"/>
+    <p:sldId id="261" r:id="rId7"/>
+    <p:sldId id="262" r:id="rId8"/>
   </p:sldIdLst>
   <p:sldSz cx="9144000" cy="6858000" type="screen4x3"/>
   <p:notesSz cx="6858000" cy="9144000"/>
@@ -110,6 +110,22 @@
       </a:defRPr>
     </a:lvl9pPr>
   </p:defaultTextStyle>
+  <p:extLst>
+    <p:ext uri="{EFAFB233-063F-42B5-8137-9DF3F51BA10A}">
+      <p15:sldGuideLst xmlns:p15="http://schemas.microsoft.com/office/powerpoint/2012/main">
+        <p15:guide id="1" orient="horz" pos="2160">
+          <p15:clr>
+            <a:srgbClr val="A4A3A4"/>
+          </p15:clr>
+        </p15:guide>
+        <p15:guide id="2" pos="2880">
+          <p15:clr>
+            <a:srgbClr val="A4A3A4"/>
+          </p15:clr>
+        </p15:guide>
+      </p15:sldGuideLst>
+    </p:ext>
+  </p:extLst>
 </p:presentation>
 </file>
 
@@ -151,10 +167,9 @@
           <a:lstStyle/>
           <a:p>
             <a:r>
-              <a:rPr lang="en-US" smtClean="0"/>
+              <a:rPr lang="en-US"/>
               <a:t>Click to edit Master title style</a:t>
             </a:r>
-            <a:endParaRPr lang="en-US"/>
           </a:p>
         </p:txBody>
       </p:sp>
@@ -270,10 +285,9 @@
           </a:lstStyle>
           <a:p>
             <a:r>
-              <a:rPr lang="en-US" smtClean="0"/>
+              <a:rPr lang="en-US"/>
               <a:t>Click to edit Master subtitle style</a:t>
             </a:r>
-            <a:endParaRPr lang="en-US"/>
           </a:p>
         </p:txBody>
       </p:sp>
@@ -294,7 +308,7 @@
           <a:p>
             <a:fld id="{5BCAD085-E8A6-8845-BD4E-CB4CCA059FC4}" type="datetimeFigureOut">
               <a:rPr lang="en-US" smtClean="0"/>
-              <a:t>1/27/13</a:t>
+              <a:t>8/20/2026</a:t>
             </a:fld>
             <a:endParaRPr lang="en-US"/>
           </a:p>
@@ -388,10 +402,9 @@
           <a:lstStyle/>
           <a:p>
             <a:r>
-              <a:rPr lang="en-US" smtClean="0"/>
+              <a:rPr lang="en-US"/>
               <a:t>Click to edit Master title style</a:t>
             </a:r>
-            <a:endParaRPr lang="en-US"/>
           </a:p>
         </p:txBody>
       </p:sp>
@@ -412,38 +425,37 @@
           <a:p>
             <a:pPr lvl="0"/>
             <a:r>
-              <a:rPr lang="en-US" smtClean="0"/>
+              <a:rPr lang="en-US"/>
               <a:t>Click to edit Master text styles</a:t>
             </a:r>
           </a:p>
           <a:p>
             <a:pPr lvl="1"/>
             <a:r>
-              <a:rPr lang="en-US" smtClean="0"/>
+              <a:rPr lang="en-US"/>
               <a:t>Second level</a:t>
             </a:r>
           </a:p>
           <a:p>
             <a:pPr lvl="2"/>
             <a:r>
-              <a:rPr lang="en-US" smtClean="0"/>
+              <a:rPr lang="en-US"/>
               <a:t>Third level</a:t>
             </a:r>
           </a:p>
           <a:p>
             <a:pPr lvl="3"/>
             <a:r>
-              <a:rPr lang="en-US" smtClean="0"/>
+              <a:rPr lang="en-US"/>
               <a:t>Fourth level</a:t>
             </a:r>
           </a:p>
           <a:p>
             <a:pPr lvl="4"/>
             <a:r>
-              <a:rPr lang="en-US" smtClean="0"/>
+              <a:rPr lang="en-US"/>
               <a:t>Fifth level</a:t>
             </a:r>
-            <a:endParaRPr lang="en-US"/>
           </a:p>
         </p:txBody>
       </p:sp>
@@ -464,7 +476,7 @@
           <a:p>
             <a:fld id="{5BCAD085-E8A6-8845-BD4E-CB4CCA059FC4}" type="datetimeFigureOut">
               <a:rPr lang="en-US" smtClean="0"/>
-              <a:t>1/27/13</a:t>
+              <a:t>8/20/2026</a:t>
             </a:fld>
             <a:endParaRPr lang="en-US"/>
           </a:p>
@@ -563,10 +575,9 @@
           <a:lstStyle/>
           <a:p>
             <a:r>
-              <a:rPr lang="en-US" smtClean="0"/>
+              <a:rPr lang="en-US"/>
               <a:t>Click to edit Master title style</a:t>
             </a:r>
-            <a:endParaRPr lang="en-US"/>
           </a:p>
         </p:txBody>
       </p:sp>
@@ -592,38 +603,37 @@
           <a:p>
             <a:pPr lvl="0"/>
             <a:r>
-              <a:rPr lang="en-US" smtClean="0"/>
+              <a:rPr lang="en-US"/>
               <a:t>Click to edit Master text styles</a:t>
             </a:r>
           </a:p>
           <a:p>
             <a:pPr lvl="1"/>
             <a:r>
-              <a:rPr lang="en-US" smtClean="0"/>
+              <a:rPr lang="en-US"/>
               <a:t>Second level</a:t>
             </a:r>
           </a:p>
           <a:p>
             <a:pPr lvl="2"/>
             <a:r>
-              <a:rPr lang="en-US" smtClean="0"/>
+              <a:rPr lang="en-US"/>
               <a:t>Third level</a:t>
             </a:r>
           </a:p>
           <a:p>
             <a:pPr lvl="3"/>
             <a:r>
-              <a:rPr lang="en-US" smtClean="0"/>
+              <a:rPr lang="en-US"/>
               <a:t>Fourth level</a:t>
             </a:r>
           </a:p>
           <a:p>
             <a:pPr lvl="4"/>
             <a:r>
-              <a:rPr lang="en-US" smtClean="0"/>
+              <a:rPr lang="en-US"/>
               <a:t>Fifth level</a:t>
             </a:r>
-            <a:endParaRPr lang="en-US"/>
           </a:p>
         </p:txBody>
       </p:sp>
@@ -644,7 +654,7 @@
           <a:p>
             <a:fld id="{5BCAD085-E8A6-8845-BD4E-CB4CCA059FC4}" type="datetimeFigureOut">
               <a:rPr lang="en-US" smtClean="0"/>
-              <a:t>1/27/13</a:t>
+              <a:t>8/20/2026</a:t>
             </a:fld>
             <a:endParaRPr lang="en-US"/>
           </a:p>
@@ -738,10 +748,9 @@
           <a:lstStyle/>
           <a:p>
             <a:r>
-              <a:rPr lang="en-US" smtClean="0"/>
+              <a:rPr lang="en-US"/>
               <a:t>Click to edit Master title style</a:t>
             </a:r>
-            <a:endParaRPr lang="en-US"/>
           </a:p>
         </p:txBody>
       </p:sp>
@@ -762,38 +771,37 @@
           <a:p>
             <a:pPr lvl="0"/>
             <a:r>
-              <a:rPr lang="en-US" smtClean="0"/>
+              <a:rPr lang="en-US"/>
               <a:t>Click to edit Master text styles</a:t>
             </a:r>
           </a:p>
           <a:p>
             <a:pPr lvl="1"/>
             <a:r>
-              <a:rPr lang="en-US" smtClean="0"/>
+              <a:rPr lang="en-US"/>
               <a:t>Second level</a:t>
             </a:r>
           </a:p>
           <a:p>
             <a:pPr lvl="2"/>
             <a:r>
-              <a:rPr lang="en-US" smtClean="0"/>
+              <a:rPr lang="en-US"/>
               <a:t>Third level</a:t>
             </a:r>
           </a:p>
           <a:p>
             <a:pPr lvl="3"/>
             <a:r>
-              <a:rPr lang="en-US" smtClean="0"/>
+              <a:rPr lang="en-US"/>
               <a:t>Fourth level</a:t>
             </a:r>
           </a:p>
           <a:p>
             <a:pPr lvl="4"/>
             <a:r>
-              <a:rPr lang="en-US" smtClean="0"/>
+              <a:rPr lang="en-US"/>
               <a:t>Fifth level</a:t>
             </a:r>
-            <a:endParaRPr lang="en-US"/>
           </a:p>
         </p:txBody>
       </p:sp>
@@ -814,7 +822,7 @@
           <a:p>
             <a:fld id="{5BCAD085-E8A6-8845-BD4E-CB4CCA059FC4}" type="datetimeFigureOut">
               <a:rPr lang="en-US" smtClean="0"/>
-              <a:t>1/27/13</a:t>
+              <a:t>8/20/2026</a:t>
             </a:fld>
             <a:endParaRPr lang="en-US"/>
           </a:p>
@@ -917,10 +925,9 @@
           </a:lstStyle>
           <a:p>
             <a:r>
-              <a:rPr lang="en-US" smtClean="0"/>
+              <a:rPr lang="en-US"/>
               <a:t>Click to edit Master title style</a:t>
             </a:r>
-            <a:endParaRPr lang="en-US"/>
           </a:p>
         </p:txBody>
       </p:sp>
@@ -1037,7 +1044,7 @@
           <a:p>
             <a:pPr lvl="0"/>
             <a:r>
-              <a:rPr lang="en-US" smtClean="0"/>
+              <a:rPr lang="en-US"/>
               <a:t>Click to edit Master text styles</a:t>
             </a:r>
           </a:p>
@@ -1060,7 +1067,7 @@
           <a:p>
             <a:fld id="{5BCAD085-E8A6-8845-BD4E-CB4CCA059FC4}" type="datetimeFigureOut">
               <a:rPr lang="en-US" smtClean="0"/>
-              <a:t>1/27/13</a:t>
+              <a:t>8/20/2026</a:t>
             </a:fld>
             <a:endParaRPr lang="en-US"/>
           </a:p>
@@ -1154,10 +1161,9 @@
           <a:lstStyle/>
           <a:p>
             <a:r>
-              <a:rPr lang="en-US" smtClean="0"/>
+              <a:rPr lang="en-US"/>
               <a:t>Click to edit Master title style</a:t>
             </a:r>
-            <a:endParaRPr lang="en-US"/>
           </a:p>
         </p:txBody>
       </p:sp>
@@ -1211,38 +1217,37 @@
           <a:p>
             <a:pPr lvl="0"/>
             <a:r>
-              <a:rPr lang="en-US" smtClean="0"/>
+              <a:rPr lang="en-US"/>
               <a:t>Click to edit Master text styles</a:t>
             </a:r>
           </a:p>
           <a:p>
             <a:pPr lvl="1"/>
             <a:r>
-              <a:rPr lang="en-US" smtClean="0"/>
+              <a:rPr lang="en-US"/>
               <a:t>Second level</a:t>
             </a:r>
           </a:p>
           <a:p>
             <a:pPr lvl="2"/>
             <a:r>
-              <a:rPr lang="en-US" smtClean="0"/>
+              <a:rPr lang="en-US"/>
               <a:t>Third level</a:t>
             </a:r>
           </a:p>
           <a:p>
             <a:pPr lvl="3"/>
             <a:r>
-              <a:rPr lang="en-US" smtClean="0"/>
+              <a:rPr lang="en-US"/>
               <a:t>Fourth level</a:t>
             </a:r>
           </a:p>
           <a:p>
             <a:pPr lvl="4"/>
             <a:r>
-              <a:rPr lang="en-US" smtClean="0"/>
+              <a:rPr lang="en-US"/>
               <a:t>Fifth level</a:t>
             </a:r>
-            <a:endParaRPr lang="en-US"/>
           </a:p>
         </p:txBody>
       </p:sp>
@@ -1296,38 +1301,37 @@
           <a:p>
             <a:pPr lvl="0"/>
             <a:r>
-              <a:rPr lang="en-US" smtClean="0"/>
+              <a:rPr lang="en-US"/>
               <a:t>Click to edit Master text styles</a:t>
             </a:r>
           </a:p>
           <a:p>
             <a:pPr lvl="1"/>
             <a:r>
-              <a:rPr lang="en-US" smtClean="0"/>
+              <a:rPr lang="en-US"/>
               <a:t>Second level</a:t>
             </a:r>
           </a:p>
           <a:p>
             <a:pPr lvl="2"/>
             <a:r>
-              <a:rPr lang="en-US" smtClean="0"/>
+              <a:rPr lang="en-US"/>
               <a:t>Third level</a:t>
             </a:r>
           </a:p>
           <a:p>
             <a:pPr lvl="3"/>
             <a:r>
-              <a:rPr lang="en-US" smtClean="0"/>
+              <a:rPr lang="en-US"/>
               <a:t>Fourth level</a:t>
             </a:r>
           </a:p>
           <a:p>
             <a:pPr lvl="4"/>
             <a:r>
-              <a:rPr lang="en-US" smtClean="0"/>
+              <a:rPr lang="en-US"/>
               <a:t>Fifth level</a:t>
             </a:r>
-            <a:endParaRPr lang="en-US"/>
           </a:p>
         </p:txBody>
       </p:sp>
@@ -1348,7 +1352,7 @@
           <a:p>
             <a:fld id="{5BCAD085-E8A6-8845-BD4E-CB4CCA059FC4}" type="datetimeFigureOut">
               <a:rPr lang="en-US" smtClean="0"/>
-              <a:t>1/27/13</a:t>
+              <a:t>8/20/2026</a:t>
             </a:fld>
             <a:endParaRPr lang="en-US"/>
           </a:p>
@@ -1446,10 +1450,9 @@
           </a:lstStyle>
           <a:p>
             <a:r>
-              <a:rPr lang="en-US" smtClean="0"/>
+              <a:rPr lang="en-US"/>
               <a:t>Click to edit Master title style</a:t>
             </a:r>
-            <a:endParaRPr lang="en-US"/>
           </a:p>
         </p:txBody>
       </p:sp>
@@ -1512,7 +1515,7 @@
           <a:p>
             <a:pPr lvl="0"/>
             <a:r>
-              <a:rPr lang="en-US" smtClean="0"/>
+              <a:rPr lang="en-US"/>
               <a:t>Click to edit Master text styles</a:t>
             </a:r>
           </a:p>
@@ -1568,38 +1571,37 @@
           <a:p>
             <a:pPr lvl="0"/>
             <a:r>
-              <a:rPr lang="en-US" smtClean="0"/>
+              <a:rPr lang="en-US"/>
               <a:t>Click to edit Master text styles</a:t>
             </a:r>
           </a:p>
           <a:p>
             <a:pPr lvl="1"/>
             <a:r>
-              <a:rPr lang="en-US" smtClean="0"/>
+              <a:rPr lang="en-US"/>
               <a:t>Second level</a:t>
             </a:r>
           </a:p>
           <a:p>
             <a:pPr lvl="2"/>
             <a:r>
-              <a:rPr lang="en-US" smtClean="0"/>
+              <a:rPr lang="en-US"/>
               <a:t>Third level</a:t>
             </a:r>
           </a:p>
           <a:p>
             <a:pPr lvl="3"/>
             <a:r>
-              <a:rPr lang="en-US" smtClean="0"/>
+              <a:rPr lang="en-US"/>
               <a:t>Fourth level</a:t>
             </a:r>
           </a:p>
           <a:p>
             <a:pPr lvl="4"/>
             <a:r>
-              <a:rPr lang="en-US" smtClean="0"/>
+              <a:rPr lang="en-US"/>
               <a:t>Fifth level</a:t>
             </a:r>
-            <a:endParaRPr lang="en-US"/>
           </a:p>
         </p:txBody>
       </p:sp>
@@ -1662,7 +1664,7 @@
           <a:p>
             <a:pPr lvl="0"/>
             <a:r>
-              <a:rPr lang="en-US" smtClean="0"/>
+              <a:rPr lang="en-US"/>
               <a:t>Click to edit Master text styles</a:t>
             </a:r>
           </a:p>
@@ -1718,38 +1720,37 @@
           <a:p>
             <a:pPr lvl="0"/>
             <a:r>
-              <a:rPr lang="en-US" smtClean="0"/>
+              <a:rPr lang="en-US"/>
               <a:t>Click to edit Master text styles</a:t>
             </a:r>
           </a:p>
           <a:p>
             <a:pPr lvl="1"/>
             <a:r>
-              <a:rPr lang="en-US" smtClean="0"/>
+              <a:rPr lang="en-US"/>
               <a:t>Second level</a:t>
             </a:r>
           </a:p>
           <a:p>
             <a:pPr lvl="2"/>
             <a:r>
-              <a:rPr lang="en-US" smtClean="0"/>
+              <a:rPr lang="en-US"/>
               <a:t>Third level</a:t>
             </a:r>
           </a:p>
           <a:p>
             <a:pPr lvl="3"/>
             <a:r>
-              <a:rPr lang="en-US" smtClean="0"/>
+              <a:rPr lang="en-US"/>
               <a:t>Fourth level</a:t>
             </a:r>
           </a:p>
           <a:p>
             <a:pPr lvl="4"/>
             <a:r>
-              <a:rPr lang="en-US" smtClean="0"/>
+              <a:rPr lang="en-US"/>
               <a:t>Fifth level</a:t>
             </a:r>
-            <a:endParaRPr lang="en-US"/>
           </a:p>
         </p:txBody>
       </p:sp>
@@ -1770,7 +1771,7 @@
           <a:p>
             <a:fld id="{5BCAD085-E8A6-8845-BD4E-CB4CCA059FC4}" type="datetimeFigureOut">
               <a:rPr lang="en-US" smtClean="0"/>
-              <a:t>1/27/13</a:t>
+              <a:t>8/20/2026</a:t>
             </a:fld>
             <a:endParaRPr lang="en-US"/>
           </a:p>
@@ -1864,10 +1865,9 @@
           <a:lstStyle/>
           <a:p>
             <a:r>
-              <a:rPr lang="en-US" smtClean="0"/>
+              <a:rPr lang="en-US"/>
               <a:t>Click to edit Master title style</a:t>
             </a:r>
-            <a:endParaRPr lang="en-US"/>
           </a:p>
         </p:txBody>
       </p:sp>
@@ -1888,7 +1888,7 @@
           <a:p>
             <a:fld id="{5BCAD085-E8A6-8845-BD4E-CB4CCA059FC4}" type="datetimeFigureOut">
               <a:rPr lang="en-US" smtClean="0"/>
-              <a:t>1/27/13</a:t>
+              <a:t>8/20/2026</a:t>
             </a:fld>
             <a:endParaRPr lang="en-US"/>
           </a:p>
@@ -1983,7 +1983,7 @@
           <a:p>
             <a:fld id="{5BCAD085-E8A6-8845-BD4E-CB4CCA059FC4}" type="datetimeFigureOut">
               <a:rPr lang="en-US" smtClean="0"/>
-              <a:t>1/27/13</a:t>
+              <a:t>8/20/2026</a:t>
             </a:fld>
             <a:endParaRPr lang="en-US"/>
           </a:p>
@@ -2086,10 +2086,9 @@
           </a:lstStyle>
           <a:p>
             <a:r>
-              <a:rPr lang="en-US" smtClean="0"/>
+              <a:rPr lang="en-US"/>
               <a:t>Click to edit Master title style</a:t>
             </a:r>
-            <a:endParaRPr lang="en-US"/>
           </a:p>
         </p:txBody>
       </p:sp>
@@ -2143,38 +2142,37 @@
           <a:p>
             <a:pPr lvl="0"/>
             <a:r>
-              <a:rPr lang="en-US" smtClean="0"/>
+              <a:rPr lang="en-US"/>
               <a:t>Click to edit Master text styles</a:t>
             </a:r>
           </a:p>
           <a:p>
             <a:pPr lvl="1"/>
             <a:r>
-              <a:rPr lang="en-US" smtClean="0"/>
+              <a:rPr lang="en-US"/>
               <a:t>Second level</a:t>
             </a:r>
           </a:p>
           <a:p>
             <a:pPr lvl="2"/>
             <a:r>
-              <a:rPr lang="en-US" smtClean="0"/>
+              <a:rPr lang="en-US"/>
               <a:t>Third level</a:t>
             </a:r>
           </a:p>
           <a:p>
             <a:pPr lvl="3"/>
             <a:r>
-              <a:rPr lang="en-US" smtClean="0"/>
+              <a:rPr lang="en-US"/>
               <a:t>Fourth level</a:t>
             </a:r>
           </a:p>
           <a:p>
             <a:pPr lvl="4"/>
             <a:r>
-              <a:rPr lang="en-US" smtClean="0"/>
+              <a:rPr lang="en-US"/>
               <a:t>Fifth level</a:t>
             </a:r>
-            <a:endParaRPr lang="en-US"/>
           </a:p>
         </p:txBody>
       </p:sp>
@@ -2237,7 +2235,7 @@
           <a:p>
             <a:pPr lvl="0"/>
             <a:r>
-              <a:rPr lang="en-US" smtClean="0"/>
+              <a:rPr lang="en-US"/>
               <a:t>Click to edit Master text styles</a:t>
             </a:r>
           </a:p>
@@ -2260,7 +2258,7 @@
           <a:p>
             <a:fld id="{5BCAD085-E8A6-8845-BD4E-CB4CCA059FC4}" type="datetimeFigureOut">
               <a:rPr lang="en-US" smtClean="0"/>
-              <a:t>1/27/13</a:t>
+              <a:t>8/20/2026</a:t>
             </a:fld>
             <a:endParaRPr lang="en-US"/>
           </a:p>
@@ -2363,10 +2361,9 @@
           </a:lstStyle>
           <a:p>
             <a:r>
-              <a:rPr lang="en-US" smtClean="0"/>
+              <a:rPr lang="en-US"/>
               <a:t>Click to edit Master title style</a:t>
             </a:r>
-            <a:endParaRPr lang="en-US"/>
           </a:p>
         </p:txBody>
       </p:sp>
@@ -2490,7 +2487,7 @@
           <a:p>
             <a:pPr lvl="0"/>
             <a:r>
-              <a:rPr lang="en-US" smtClean="0"/>
+              <a:rPr lang="en-US"/>
               <a:t>Click to edit Master text styles</a:t>
             </a:r>
           </a:p>
@@ -2513,7 +2510,7 @@
           <a:p>
             <a:fld id="{5BCAD085-E8A6-8845-BD4E-CB4CCA059FC4}" type="datetimeFigureOut">
               <a:rPr lang="en-US" smtClean="0"/>
-              <a:t>1/27/13</a:t>
+              <a:t>8/20/2026</a:t>
             </a:fld>
             <a:endParaRPr lang="en-US"/>
           </a:p>
@@ -2622,10 +2619,9 @@
           <a:lstStyle/>
           <a:p>
             <a:r>
-              <a:rPr lang="en-US" smtClean="0"/>
+              <a:rPr lang="en-US"/>
               <a:t>Click to edit Master title style</a:t>
             </a:r>
-            <a:endParaRPr lang="en-US"/>
           </a:p>
         </p:txBody>
       </p:sp>
@@ -2656,38 +2652,37 @@
           <a:p>
             <a:pPr lvl="0"/>
             <a:r>
-              <a:rPr lang="en-US" smtClean="0"/>
+              <a:rPr lang="en-US"/>
               <a:t>Click to edit Master text styles</a:t>
             </a:r>
           </a:p>
           <a:p>
             <a:pPr lvl="1"/>
             <a:r>
-              <a:rPr lang="en-US" smtClean="0"/>
+              <a:rPr lang="en-US"/>
               <a:t>Second level</a:t>
             </a:r>
           </a:p>
           <a:p>
             <a:pPr lvl="2"/>
             <a:r>
-              <a:rPr lang="en-US" smtClean="0"/>
+              <a:rPr lang="en-US"/>
               <a:t>Third level</a:t>
             </a:r>
           </a:p>
           <a:p>
             <a:pPr lvl="3"/>
             <a:r>
-              <a:rPr lang="en-US" smtClean="0"/>
+              <a:rPr lang="en-US"/>
               <a:t>Fourth level</a:t>
             </a:r>
           </a:p>
           <a:p>
             <a:pPr lvl="4"/>
             <a:r>
-              <a:rPr lang="en-US" smtClean="0"/>
+              <a:rPr lang="en-US"/>
               <a:t>Fifth level</a:t>
             </a:r>
-            <a:endParaRPr lang="en-US"/>
           </a:p>
         </p:txBody>
       </p:sp>
@@ -2726,7 +2721,7 @@
           <a:p>
             <a:fld id="{5BCAD085-E8A6-8845-BD4E-CB4CCA059FC4}" type="datetimeFigureOut">
               <a:rPr lang="en-US" smtClean="0"/>
-              <a:t>1/27/13</a:t>
+              <a:t>8/20/2026</a:t>
             </a:fld>
             <a:endParaRPr lang="en-US"/>
           </a:p>
@@ -3085,7 +3080,7 @@
 </file>
 
 <file path=ppt/slides/slide1.xml><?xml version="1.0" encoding="utf-8"?>
-<p:sld xmlns:a="http://schemas.openxmlformats.org/drawingml/2006/main" xmlns:p="http://schemas.openxmlformats.org/presentationml/2006/main" xmlns:r="http://schemas.openxmlformats.org/officeDocument/2006/relationships">
+<p:sld xmlns:a="http://schemas.openxmlformats.org/drawingml/2006/main" xmlns:r="http://schemas.openxmlformats.org/officeDocument/2006/relationships" xmlns:p="http://schemas.openxmlformats.org/presentationml/2006/main">
   <p:cSld>
     <p:bg>
       <p:bgPr>
@@ -3101,7 +3096,14 @@
         <p:cNvGrpSpPr/>
         <p:nvPr/>
       </p:nvGrpSpPr>
-      <p:grpSpPr/>
+      <p:grpSpPr>
+        <a:xfrm>
+          <a:off x="0" y="0"/>
+          <a:ext cx="0" cy="0"/>
+          <a:chOff x="0" y="0"/>
+          <a:chExt cx="0" cy="0"/>
+        </a:xfrm>
+      </p:grpSpPr>
       <p:sp>
         <p:nvSpPr>
           <p:cNvPr id="2" name="TextBox 1"/>
@@ -3175,6 +3177,7 @@
           <a:lstStyle/>
           <a:p>
             <a:pPr algn="ctr"/>
+            <a:endParaRPr/>
           </a:p>
         </p:txBody>
       </p:sp>
@@ -3220,7 +3223,7 @@
 </file>
 
 <file path=ppt/slides/slide2.xml><?xml version="1.0" encoding="utf-8"?>
-<p:sld xmlns:a="http://schemas.openxmlformats.org/drawingml/2006/main" xmlns:p="http://schemas.openxmlformats.org/presentationml/2006/main" xmlns:r="http://schemas.openxmlformats.org/officeDocument/2006/relationships">
+<p:sld xmlns:a="http://schemas.openxmlformats.org/drawingml/2006/main" xmlns:r="http://schemas.openxmlformats.org/officeDocument/2006/relationships" xmlns:p="http://schemas.openxmlformats.org/presentationml/2006/main">
   <p:cSld>
     <p:bg>
       <p:bgPr>
@@ -3236,7 +3239,14 @@
         <p:cNvGrpSpPr/>
         <p:nvPr/>
       </p:nvGrpSpPr>
-      <p:grpSpPr/>
+      <p:grpSpPr>
+        <a:xfrm>
+          <a:off x="0" y="0"/>
+          <a:ext cx="0" cy="0"/>
+          <a:chOff x="0" y="0"/>
+          <a:chExt cx="0" cy="0"/>
+        </a:xfrm>
+      </p:grpSpPr>
       <p:sp>
         <p:nvSpPr>
           <p:cNvPr id="2" name="Rectangle 1"/>
@@ -3277,6 +3287,7 @@
           <a:lstStyle/>
           <a:p>
             <a:pPr algn="ctr"/>
+            <a:endParaRPr/>
           </a:p>
         </p:txBody>
       </p:sp>
@@ -3402,6 +3413,7 @@
           <a:lstStyle/>
           <a:p>
             <a:pPr algn="ctr"/>
+            <a:endParaRPr/>
           </a:p>
         </p:txBody>
       </p:sp>
@@ -3445,6 +3457,7 @@
           <a:lstStyle/>
           <a:p>
             <a:pPr algn="ctr"/>
+            <a:endParaRPr/>
           </a:p>
         </p:txBody>
       </p:sp>
@@ -3529,6 +3542,7 @@
           <a:lstStyle/>
           <a:p>
             <a:pPr algn="ctr"/>
+            <a:endParaRPr/>
           </a:p>
         </p:txBody>
       </p:sp>
@@ -3654,6 +3668,7 @@
           <a:lstStyle/>
           <a:p>
             <a:pPr algn="ctr"/>
+            <a:endParaRPr/>
           </a:p>
         </p:txBody>
       </p:sp>
@@ -3697,6 +3712,7 @@
           <a:lstStyle/>
           <a:p>
             <a:pPr algn="ctr"/>
+            <a:endParaRPr/>
           </a:p>
         </p:txBody>
       </p:sp>
@@ -3750,7 +3766,7 @@
         <p:spPr>
           <a:xfrm>
             <a:off x="685800" y="2286000"/>
-            <a:ext cx="3931920" cy="3383280"/>
+            <a:ext cx="3931920" cy="1200329"/>
           </a:xfrm>
           <a:prstGeom prst="rect">
             <a:avLst/>
@@ -3764,23 +3780,28 @@
           <a:lstStyle/>
           <a:p>
             <a:r>
-              <a:rPr>
+              <a:rPr lang="vi-VN">
                 <a:solidFill>
                   <a:srgbClr val="FFFFFF"/>
                 </a:solidFill>
               </a:rPr>
-              <a:t>• Đánh giá robustness của causal measurement framework dưới synthetic stress scenarios.</a:t>
-            </a:r>
-          </a:p>
-          <a:p>
-            <a:r>
-              <a:rPr>
+              <a:t>• Kiểm tra measurement framework dưới các synthetic stress scenarios.</a:t>
+            </a:r>
+          </a:p>
+          <a:p>
+            <a:r>
+              <a:rPr lang="vi-VN">
                 <a:solidFill>
                   <a:srgbClr val="FFFFFF"/>
                 </a:solidFill>
               </a:rPr>
-              <a:t>• Kiểm tra estimator có failure rõ ràng khi sample size, treatment ratio và noise thay đổi hay không.</a:t>
-            </a:r>
+              <a:t>• Mỗi scenario tái gán treatment, dựng Y từ Y0/Y1 và dùng OLS HC1.</a:t>
+            </a:r>
+            <a:endParaRPr>
+              <a:solidFill>
+                <a:srgbClr val="FFFFFF"/>
+              </a:solidFill>
+            </a:endParaRPr>
           </a:p>
         </p:txBody>
       </p:sp>
@@ -3824,6 +3845,7 @@
           <a:lstStyle/>
           <a:p>
             <a:pPr algn="ctr"/>
+            <a:endParaRPr/>
           </a:p>
         </p:txBody>
       </p:sp>
@@ -3867,6 +3889,7 @@
           <a:lstStyle/>
           <a:p>
             <a:pPr algn="ctr"/>
+            <a:endParaRPr/>
           </a:p>
         </p:txBody>
       </p:sp>
@@ -3920,7 +3943,7 @@
         <p:spPr>
           <a:xfrm>
             <a:off x="4892040" y="2286000"/>
-            <a:ext cx="3931920" cy="3383280"/>
+            <a:ext cx="3931920" cy="1477328"/>
           </a:xfrm>
           <a:prstGeom prst="rect">
             <a:avLst/>
@@ -3934,23 +3957,28 @@
           <a:lstStyle/>
           <a:p>
             <a:r>
-              <a:rPr>
+              <a:rPr lang="en-US">
                 <a:solidFill>
                   <a:srgbClr val="FFFFFF"/>
                 </a:solidFill>
               </a:rPr>
-              <a:t>• Thực hiện 4 bài kiểm tra: Scalability, A/A Test, Imbalanced Ratio, Noise Injection.</a:t>
-            </a:r>
-          </a:p>
-          <a:p>
-            <a:r>
-              <a:rPr>
+              <a:t>• Bốn test: sample-size scale-up, A/A null, 10/90 imbalance và mean-zero noise.</a:t>
+            </a:r>
+          </a:p>
+          <a:p>
+            <a:r>
+              <a:rPr lang="en-US">
                 <a:solidFill>
                   <a:srgbClr val="FFFFFF"/>
                 </a:solidFill>
               </a:rPr>
-              <a:t>• Theo dõi ATE estimate, uncertainty và false positive behavior trong từng kịch bản.</a:t>
-            </a:r>
+              <a:t>• Theo dõi bias, estimator SD, HC1 SE và coverage.</a:t>
+            </a:r>
+            <a:endParaRPr>
+              <a:solidFill>
+                <a:srgbClr val="FFFFFF"/>
+              </a:solidFill>
+            </a:endParaRPr>
           </a:p>
         </p:txBody>
       </p:sp>
@@ -3963,7 +3991,7 @@
 </file>
 
 <file path=ppt/slides/slide3.xml><?xml version="1.0" encoding="utf-8"?>
-<p:sld xmlns:a="http://schemas.openxmlformats.org/drawingml/2006/main" xmlns:p="http://schemas.openxmlformats.org/presentationml/2006/main" xmlns:r="http://schemas.openxmlformats.org/officeDocument/2006/relationships">
+<p:sld xmlns:a="http://schemas.openxmlformats.org/drawingml/2006/main" xmlns:r="http://schemas.openxmlformats.org/officeDocument/2006/relationships" xmlns:p="http://schemas.openxmlformats.org/presentationml/2006/main">
   <p:cSld>
     <p:bg>
       <p:bgPr>
@@ -3979,7 +4007,14 @@
         <p:cNvGrpSpPr/>
         <p:nvPr/>
       </p:nvGrpSpPr>
-      <p:grpSpPr/>
+      <p:grpSpPr>
+        <a:xfrm>
+          <a:off x="0" y="0"/>
+          <a:ext cx="0" cy="0"/>
+          <a:chOff x="0" y="0"/>
+          <a:chExt cx="0" cy="0"/>
+        </a:xfrm>
+      </p:grpSpPr>
       <p:sp>
         <p:nvSpPr>
           <p:cNvPr id="2" name="Rectangle 1"/>
@@ -4020,6 +4055,7 @@
           <a:lstStyle/>
           <a:p>
             <a:pPr algn="ctr"/>
+            <a:endParaRPr/>
           </a:p>
         </p:txBody>
       </p:sp>
@@ -4145,6 +4181,7 @@
           <a:lstStyle/>
           <a:p>
             <a:pPr algn="ctr"/>
+            <a:endParaRPr/>
           </a:p>
         </p:txBody>
       </p:sp>
@@ -4188,6 +4225,7 @@
           <a:lstStyle/>
           <a:p>
             <a:pPr algn="ctr"/>
+            <a:endParaRPr/>
           </a:p>
         </p:txBody>
       </p:sp>
@@ -4272,6 +4310,7 @@
           <a:lstStyle/>
           <a:p>
             <a:pPr algn="ctr"/>
+            <a:endParaRPr/>
           </a:p>
         </p:txBody>
       </p:sp>
@@ -4397,6 +4436,7 @@
           <a:lstStyle/>
           <a:p>
             <a:pPr algn="ctr"/>
+            <a:endParaRPr/>
           </a:p>
         </p:txBody>
       </p:sp>
@@ -4440,6 +4480,7 @@
           <a:lstStyle/>
           <a:p>
             <a:pPr algn="ctr"/>
+            <a:endParaRPr/>
           </a:p>
         </p:txBody>
       </p:sp>
@@ -4493,7 +4534,7 @@
         <p:spPr>
           <a:xfrm>
             <a:off x="685800" y="1874520"/>
-            <a:ext cx="3749040" cy="1783080"/>
+            <a:ext cx="3749040" cy="1005403"/>
           </a:xfrm>
           <a:prstGeom prst="rect">
             <a:avLst/>
@@ -4518,13 +4559,39 @@
               </a:defRPr>
             </a:pPr>
             <a:r>
-              <a:rPr>
+              <a:rPr lang="en-US">
                 <a:solidFill>
                   <a:srgbClr val="FFFFFF"/>
                 </a:solidFill>
               </a:rPr>
-              <a:t>• Tăng dần kích thước mẫu (Sample Size) từ 10,000 lên hàng trăm ngàn quan sát.</a:t>
-            </a:r>
+              <a:t>• 1.000-100.000 observations; 100 lần lặp mỗi mức.</a:t>
+            </a:r>
+          </a:p>
+          <a:p>
+            <a:pPr>
+              <a:spcAft>
+                <a:spcPts val="400"/>
+              </a:spcAft>
+              <a:defRPr sz="1400">
+                <a:solidFill>
+                  <a:srgbClr val="FFFFFF"/>
+                </a:solidFill>
+                <a:latin typeface="Segoe UI"/>
+              </a:defRPr>
+            </a:pPr>
+            <a:r>
+              <a:rPr lang="en-US">
+                <a:solidFill>
+                  <a:srgbClr val="FFFFFF"/>
+                </a:solidFill>
+              </a:rPr>
+              <a:t>• Trên 20.000 dùng bootstrap từ synthetic population.</a:t>
+            </a:r>
+            <a:endParaRPr>
+              <a:solidFill>
+                <a:srgbClr val="FFFFFF"/>
+              </a:solidFill>
+            </a:endParaRPr>
           </a:p>
         </p:txBody>
       </p:sp>
@@ -4568,6 +4635,7 @@
           <a:lstStyle/>
           <a:p>
             <a:pPr algn="ctr"/>
+            <a:endParaRPr/>
           </a:p>
         </p:txBody>
       </p:sp>
@@ -4611,6 +4679,7 @@
           <a:lstStyle/>
           <a:p>
             <a:pPr algn="ctr"/>
+            <a:endParaRPr/>
           </a:p>
         </p:txBody>
       </p:sp>
@@ -4664,7 +4733,7 @@
         <p:spPr>
           <a:xfrm>
             <a:off x="685800" y="4251960"/>
-            <a:ext cx="3749040" cy="1783080"/>
+            <a:ext cx="3749040" cy="1200329"/>
           </a:xfrm>
           <a:prstGeom prst="rect">
             <a:avLst/>
@@ -4678,29 +4747,40 @@
           <a:lstStyle/>
           <a:p>
             <a:r>
-              <a:rPr>
+              <a:rPr lang="en-US">
                 <a:solidFill>
                   <a:srgbClr val="FFFFFF"/>
                 </a:solidFill>
               </a:rPr>
-              <a:t>• Estimated ATE centered quanh synthetic benchmark trong các scenario đã kiểm tra.</a:t>
-            </a:r>
-          </a:p>
-          <a:p>
-            <a:r>
-              <a:rPr>
+              <a:t>• Mean ATE bám finite-population benchmark 0,931.</a:t>
+            </a:r>
+          </a:p>
+          <a:p>
+            <a:r>
+              <a:rPr lang="en-US">
                 <a:solidFill>
                   <a:srgbClr val="FFFFFF"/>
                 </a:solidFill>
               </a:rPr>
-              <a:t>• Khoảng tin cậy 95% hẹp dần, phù hợp expected sampling behavior khi sample size tăng.</a:t>
-            </a:r>
+              <a:t>• Estimator SD giảm từ 0,421 (n=1.000) xuống 0,044 (n=100.000).</a:t>
+            </a:r>
+            <a:endParaRPr>
+              <a:solidFill>
+                <a:srgbClr val="FFFFFF"/>
+              </a:solidFill>
+            </a:endParaRPr>
           </a:p>
         </p:txBody>
       </p:sp>
       <p:pic>
         <p:nvPicPr>
-          <p:cNvPr id="19" name="Picture 18" descr="week8_stress_test_3.png"/>
+          <p:cNvPr id="21" name="Stress Test - Sample Size Scale-up" descr="Biểu đồ nguồn: notebook và report trong repository">
+            <a:extLst>
+              <a:ext uri="{FF2B5EF4-FFF2-40B4-BE49-F238E27FC236}">
+                <a16:creationId xmlns:a16="http://schemas.microsoft.com/office/drawing/2014/main" id="{FC454EBA-34CF-7D3D-7AD2-591AAB45179C}"/>
+              </a:ext>
+            </a:extLst>
+          </p:cNvPr>
           <p:cNvPicPr>
             <a:picLocks noChangeAspect="1"/>
           </p:cNvPicPr>
@@ -4714,8 +4794,8 @@
         </p:blipFill>
         <p:spPr>
           <a:xfrm>
-            <a:off x="4572000" y="2286000"/>
-            <a:ext cx="4206240" cy="2729845"/>
+            <a:off x="4572000" y="2393533"/>
+            <a:ext cx="4206240" cy="2514779"/>
           </a:xfrm>
           <a:prstGeom prst="rect">
             <a:avLst/>
@@ -4731,7 +4811,7 @@
 </file>
 
 <file path=ppt/slides/slide4.xml><?xml version="1.0" encoding="utf-8"?>
-<p:sld xmlns:a="http://schemas.openxmlformats.org/drawingml/2006/main" xmlns:p="http://schemas.openxmlformats.org/presentationml/2006/main" xmlns:r="http://schemas.openxmlformats.org/officeDocument/2006/relationships">
+<p:sld xmlns:a="http://schemas.openxmlformats.org/drawingml/2006/main" xmlns:r="http://schemas.openxmlformats.org/officeDocument/2006/relationships" xmlns:p="http://schemas.openxmlformats.org/presentationml/2006/main">
   <p:cSld>
     <p:bg>
       <p:bgPr>
@@ -4747,7 +4827,14 @@
         <p:cNvGrpSpPr/>
         <p:nvPr/>
       </p:nvGrpSpPr>
-      <p:grpSpPr/>
+      <p:grpSpPr>
+        <a:xfrm>
+          <a:off x="0" y="0"/>
+          <a:ext cx="0" cy="0"/>
+          <a:chOff x="0" y="0"/>
+          <a:chExt cx="0" cy="0"/>
+        </a:xfrm>
+      </p:grpSpPr>
       <p:sp>
         <p:nvSpPr>
           <p:cNvPr id="2" name="Rectangle 1"/>
@@ -4788,6 +4875,7 @@
           <a:lstStyle/>
           <a:p>
             <a:pPr algn="ctr"/>
+            <a:endParaRPr/>
           </a:p>
         </p:txBody>
       </p:sp>
@@ -4913,6 +5001,7 @@
           <a:lstStyle/>
           <a:p>
             <a:pPr algn="ctr"/>
+            <a:endParaRPr/>
           </a:p>
         </p:txBody>
       </p:sp>
@@ -4956,6 +5045,7 @@
           <a:lstStyle/>
           <a:p>
             <a:pPr algn="ctr"/>
+            <a:endParaRPr/>
           </a:p>
         </p:txBody>
       </p:sp>
@@ -5040,6 +5130,7 @@
           <a:lstStyle/>
           <a:p>
             <a:pPr algn="ctr"/>
+            <a:endParaRPr/>
           </a:p>
         </p:txBody>
       </p:sp>
@@ -5165,6 +5256,7 @@
           <a:lstStyle/>
           <a:p>
             <a:pPr algn="ctr"/>
+            <a:endParaRPr/>
           </a:p>
         </p:txBody>
       </p:sp>
@@ -5208,6 +5300,7 @@
           <a:lstStyle/>
           <a:p>
             <a:pPr algn="ctr"/>
+            <a:endParaRPr/>
           </a:p>
         </p:txBody>
       </p:sp>
@@ -5261,7 +5354,7 @@
         <p:spPr>
           <a:xfrm>
             <a:off x="685800" y="2286000"/>
-            <a:ext cx="2590800" cy="3383280"/>
+            <a:ext cx="2590800" cy="1092607"/>
           </a:xfrm>
           <a:prstGeom prst="rect">
             <a:avLst/>
@@ -5286,12 +5379,12 @@
               </a:defRPr>
             </a:pPr>
             <a:r>
-              <a:rPr>
+              <a:rPr lang="en-US">
                 <a:solidFill>
                   <a:srgbClr val="FFFFFF"/>
                 </a:solidFill>
               </a:rPr>
-              <a:t>• Giả lập tình huống Voucher không có bất kỳ tác động nào (True Effect = 0).</a:t>
+              <a:t>• True Effect = 0; treatment/control 50/50.</a:t>
             </a:r>
           </a:p>
           <a:p>
@@ -5307,13 +5400,18 @@
               </a:defRPr>
             </a:pPr>
             <a:r>
-              <a:rPr>
+              <a:rPr lang="en-US">
                 <a:solidFill>
                   <a:srgbClr val="FFFFFF"/>
                 </a:solidFill>
               </a:rPr>
-              <a:t>• Chia ngẫu nhiên tập khách hàng làm 2 nhóm và so sánh.</a:t>
-            </a:r>
+              <a:t>• 5.000 runs, 2.000 observations/run.</a:t>
+            </a:r>
+            <a:endParaRPr>
+              <a:solidFill>
+                <a:srgbClr val="FFFFFF"/>
+              </a:solidFill>
+            </a:endParaRPr>
           </a:p>
         </p:txBody>
       </p:sp>
@@ -5357,6 +5455,7 @@
           <a:lstStyle/>
           <a:p>
             <a:pPr algn="ctr"/>
+            <a:endParaRPr/>
           </a:p>
         </p:txBody>
       </p:sp>
@@ -5400,6 +5499,7 @@
           <a:lstStyle/>
           <a:p>
             <a:pPr algn="ctr"/>
+            <a:endParaRPr/>
           </a:p>
         </p:txBody>
       </p:sp>
@@ -5453,7 +5553,7 @@
         <p:spPr>
           <a:xfrm>
             <a:off x="3550920" y="2286000"/>
-            <a:ext cx="2590800" cy="3383280"/>
+            <a:ext cx="2590800" cy="1200329"/>
           </a:xfrm>
           <a:prstGeom prst="rect">
             <a:avLst/>
@@ -5467,33 +5567,28 @@
           <a:lstStyle/>
           <a:p>
             <a:r>
-              <a:rPr>
+              <a:rPr lang="en-US">
                 <a:solidFill>
                   <a:srgbClr val="FFFFFF"/>
                 </a:solidFill>
               </a:rPr>
-              <a:t>• 5,000 A/A simulations.</a:t>
-            </a:r>
-          </a:p>
-          <a:p>
-            <a:r>
-              <a:rPr>
+              <a:t>• FPR = 5,04% tại alpha 5%.</a:t>
+            </a:r>
+          </a:p>
+          <a:p>
+            <a:r>
+              <a:rPr lang="en-US">
                 <a:solidFill>
                   <a:srgbClr val="FFFFFF"/>
                 </a:solidFill>
               </a:rPr>
-              <a:t>• Empirical FPR ≈ 5.08%, gần mức alpha 5%.</a:t>
-            </a:r>
-          </a:p>
-          <a:p>
-            <a:r>
-              <a:rPr>
-                <a:solidFill>
-                  <a:srgbClr val="FFFFFF"/>
-                </a:solidFill>
-              </a:rPr>
-              <a:t>• Không phát hiện calibration issue đáng kể trong settings đã kiểm tra.</a:t>
-            </a:r>
+              <a:t>• Khoảng tin cậy nhị thức 95%: [4,45%; 5,68%].</a:t>
+            </a:r>
+            <a:endParaRPr>
+              <a:solidFill>
+                <a:srgbClr val="FFFFFF"/>
+              </a:solidFill>
+            </a:endParaRPr>
           </a:p>
         </p:txBody>
       </p:sp>
@@ -5537,6 +5632,7 @@
           <a:lstStyle/>
           <a:p>
             <a:pPr algn="ctr"/>
+            <a:endParaRPr/>
           </a:p>
         </p:txBody>
       </p:sp>
@@ -5580,6 +5676,7 @@
           <a:lstStyle/>
           <a:p>
             <a:pPr algn="ctr"/>
+            <a:endParaRPr/>
           </a:p>
         </p:txBody>
       </p:sp>
@@ -5633,7 +5730,7 @@
         <p:spPr>
           <a:xfrm>
             <a:off x="6416040" y="2286000"/>
-            <a:ext cx="2590800" cy="3383280"/>
+            <a:ext cx="2590800" cy="1477328"/>
           </a:xfrm>
           <a:prstGeom prst="rect">
             <a:avLst/>
@@ -5647,23 +5744,28 @@
           <a:lstStyle/>
           <a:p>
             <a:r>
-              <a:rPr>
+              <a:rPr lang="en-US">
                 <a:solidFill>
                   <a:srgbClr val="FFFFFF"/>
                 </a:solidFill>
               </a:rPr>
-              <a:t>• A/A test giúp kiểm tra false positive behavior trước khi đọc A/B effect.</a:t>
-            </a:r>
-          </a:p>
-          <a:p>
-            <a:r>
-              <a:rPr>
+              <a:t>• Mean estimated ATE = -0,0013 chuyến.</a:t>
+            </a:r>
+          </a:p>
+          <a:p>
+            <a:r>
+              <a:rPr lang="en-US">
                 <a:solidFill>
                   <a:srgbClr val="FFFFFF"/>
                 </a:solidFill>
               </a:rPr>
-              <a:t>• Kết quả chỉ xác nhận trong synthetic scenarios đã kiểm tra.</a:t>
-            </a:r>
+              <a:t>• FPR gần mức thiết kế; không phải bằng chứng production.</a:t>
+            </a:r>
+            <a:endParaRPr>
+              <a:solidFill>
+                <a:srgbClr val="FFFFFF"/>
+              </a:solidFill>
+            </a:endParaRPr>
           </a:p>
         </p:txBody>
       </p:sp>
@@ -5676,7 +5778,7 @@
 </file>
 
 <file path=ppt/slides/slide5.xml><?xml version="1.0" encoding="utf-8"?>
-<p:sld xmlns:a="http://schemas.openxmlformats.org/drawingml/2006/main" xmlns:p="http://schemas.openxmlformats.org/presentationml/2006/main" xmlns:r="http://schemas.openxmlformats.org/officeDocument/2006/relationships">
+<p:sld xmlns:a="http://schemas.openxmlformats.org/drawingml/2006/main" xmlns:r="http://schemas.openxmlformats.org/officeDocument/2006/relationships" xmlns:p="http://schemas.openxmlformats.org/presentationml/2006/main">
   <p:cSld>
     <p:bg>
       <p:bgPr>
@@ -5692,7 +5794,14 @@
         <p:cNvGrpSpPr/>
         <p:nvPr/>
       </p:nvGrpSpPr>
-      <p:grpSpPr/>
+      <p:grpSpPr>
+        <a:xfrm>
+          <a:off x="0" y="0"/>
+          <a:ext cx="0" cy="0"/>
+          <a:chOff x="0" y="0"/>
+          <a:chExt cx="0" cy="0"/>
+        </a:xfrm>
+      </p:grpSpPr>
       <p:sp>
         <p:nvSpPr>
           <p:cNvPr id="2" name="Rectangle 1"/>
@@ -5733,6 +5842,7 @@
           <a:lstStyle/>
           <a:p>
             <a:pPr algn="ctr"/>
+            <a:endParaRPr/>
           </a:p>
         </p:txBody>
       </p:sp>
@@ -5745,7 +5855,7 @@
         <p:spPr>
           <a:xfrm>
             <a:off x="640080" y="182880"/>
-            <a:ext cx="7772400" cy="731520"/>
+            <a:ext cx="8134535" cy="492443"/>
           </a:xfrm>
           <a:prstGeom prst="rect">
             <a:avLst/>
@@ -5767,13 +5877,18 @@
               </a:defRPr>
             </a:pPr>
             <a:r>
-              <a:rPr>
+              <a:rPr lang="en-US">
                 <a:solidFill>
                   <a:srgbClr val="FFFFFF"/>
                 </a:solidFill>
               </a:rPr>
-              <a:t>4. Bài test 3: Tỷ lệ Lệch Mẫu</a:t>
-            </a:r>
+              <a:t>4. Stress Test #3 - Tỷ lệ 10/90 làm tăng độ bất định</a:t>
+            </a:r>
+            <a:endParaRPr>
+              <a:solidFill>
+                <a:srgbClr val="FFFFFF"/>
+              </a:solidFill>
+            </a:endParaRPr>
           </a:p>
         </p:txBody>
       </p:sp>
@@ -5786,7 +5901,7 @@
         <p:spPr>
           <a:xfrm>
             <a:off x="640080" y="731520"/>
-            <a:ext cx="7772400" cy="365760"/>
+            <a:ext cx="4792915" cy="292388"/>
           </a:xfrm>
           <a:prstGeom prst="rect">
             <a:avLst/>
@@ -5808,13 +5923,18 @@
               </a:defRPr>
             </a:pPr>
             <a:r>
-              <a:rPr>
+              <a:rPr lang="en-US">
                 <a:solidFill>
                   <a:srgbClr val="FFFFFF"/>
                 </a:solidFill>
               </a:rPr>
-              <a:t>Đánh giá sức chịu đựng với kích thước mẫu nhỏ</a:t>
-            </a:r>
+              <a:t>So sánh thiết kế 50/50 và 10/90 trên cùng synthetic population</a:t>
+            </a:r>
+            <a:endParaRPr>
+              <a:solidFill>
+                <a:srgbClr val="FFFFFF"/>
+              </a:solidFill>
+            </a:endParaRPr>
           </a:p>
         </p:txBody>
       </p:sp>
@@ -5858,6 +5978,7 @@
           <a:lstStyle/>
           <a:p>
             <a:pPr algn="ctr"/>
+            <a:endParaRPr/>
           </a:p>
         </p:txBody>
       </p:sp>
@@ -5901,6 +6022,7 @@
           <a:lstStyle/>
           <a:p>
             <a:pPr algn="ctr"/>
+            <a:endParaRPr/>
           </a:p>
         </p:txBody>
       </p:sp>
@@ -5985,6 +6107,7 @@
           <a:lstStyle/>
           <a:p>
             <a:pPr algn="ctr"/>
+            <a:endParaRPr/>
           </a:p>
         </p:txBody>
       </p:sp>
@@ -6110,6 +6233,7 @@
           <a:lstStyle/>
           <a:p>
             <a:pPr algn="ctr"/>
+            <a:endParaRPr/>
           </a:p>
         </p:txBody>
       </p:sp>
@@ -6153,6 +6277,7 @@
           <a:lstStyle/>
           <a:p>
             <a:pPr algn="ctr"/>
+            <a:endParaRPr/>
           </a:p>
         </p:txBody>
       </p:sp>
@@ -6206,7 +6331,7 @@
         <p:spPr>
           <a:xfrm>
             <a:off x="685800" y="2286000"/>
-            <a:ext cx="2590800" cy="3383280"/>
+            <a:ext cx="2590800" cy="1323439"/>
           </a:xfrm>
           <a:prstGeom prst="rect">
             <a:avLst/>
@@ -6231,13 +6356,39 @@
               </a:defRPr>
             </a:pPr>
             <a:r>
-              <a:rPr>
+              <a:rPr lang="vi-VN">
                 <a:solidFill>
                   <a:srgbClr val="FFFFFF"/>
                 </a:solidFill>
               </a:rPr>
-              <a:t>• Giả định ngân sách giới hạn, buộc phải ép tỷ lệ chia mẫu Control/Treatment xuống mức 90/10.</a:t>
-            </a:r>
+              <a:t>• 300 runs/design; n = 20.000.</a:t>
+            </a:r>
+          </a:p>
+          <a:p>
+            <a:pPr>
+              <a:spcAft>
+                <a:spcPts val="600"/>
+              </a:spcAft>
+              <a:defRPr sz="1500">
+                <a:solidFill>
+                  <a:srgbClr val="FFFFFF"/>
+                </a:solidFill>
+                <a:latin typeface="Segoe UI"/>
+              </a:defRPr>
+            </a:pPr>
+            <a:r>
+              <a:rPr lang="vi-VN">
+                <a:solidFill>
+                  <a:srgbClr val="FFFFFF"/>
+                </a:solidFill>
+              </a:rPr>
+              <a:t>• Treatment được gán lại trước khi dựng outcome từ Y0/Y1.</a:t>
+            </a:r>
+            <a:endParaRPr>
+              <a:solidFill>
+                <a:srgbClr val="FFFFFF"/>
+              </a:solidFill>
+            </a:endParaRPr>
           </a:p>
         </p:txBody>
       </p:sp>
@@ -6281,6 +6432,7 @@
           <a:lstStyle/>
           <a:p>
             <a:pPr algn="ctr"/>
+            <a:endParaRPr/>
           </a:p>
         </p:txBody>
       </p:sp>
@@ -6324,6 +6476,7 @@
           <a:lstStyle/>
           <a:p>
             <a:pPr algn="ctr"/>
+            <a:endParaRPr/>
           </a:p>
         </p:txBody>
       </p:sp>
@@ -6377,7 +6530,7 @@
         <p:spPr>
           <a:xfrm>
             <a:off x="3550920" y="2286000"/>
-            <a:ext cx="2590800" cy="3383280"/>
+            <a:ext cx="2590800" cy="1092607"/>
           </a:xfrm>
           <a:prstGeom prst="rect">
             <a:avLst/>
@@ -6402,12 +6555,12 @@
               </a:defRPr>
             </a:pPr>
             <a:r>
-              <a:rPr>
+              <a:rPr lang="en-US">
                 <a:solidFill>
                   <a:srgbClr val="FFFFFF"/>
                 </a:solidFill>
               </a:rPr>
-              <a:t>• Phương sai (Variance) tăng do mẫu Treatment mỏng đi.</a:t>
+              <a:t>• Estimator SD: 0,093 -&gt; 0,157 (+69%).</a:t>
             </a:r>
           </a:p>
           <a:p>
@@ -6423,13 +6576,18 @@
               </a:defRPr>
             </a:pPr>
             <a:r>
-              <a:rPr>
+              <a:rPr lang="en-US">
                 <a:solidFill>
                   <a:srgbClr val="FFFFFF"/>
                 </a:solidFill>
               </a:rPr>
-              <a:t>• Tuy nhiên, giá trị ATE ước lượng vẫn xoay quanh ATE thực tế.</a:t>
-            </a:r>
+              <a:t>• Mean HC1 SE: 0,095 -&gt; 0,162 (+70%).</a:t>
+            </a:r>
+            <a:endParaRPr>
+              <a:solidFill>
+                <a:srgbClr val="FFFFFF"/>
+              </a:solidFill>
+            </a:endParaRPr>
           </a:p>
         </p:txBody>
       </p:sp>
@@ -6473,6 +6631,7 @@
           <a:lstStyle/>
           <a:p>
             <a:pPr algn="ctr"/>
+            <a:endParaRPr/>
           </a:p>
         </p:txBody>
       </p:sp>
@@ -6516,6 +6675,7 @@
           <a:lstStyle/>
           <a:p>
             <a:pPr algn="ctr"/>
+            <a:endParaRPr/>
           </a:p>
         </p:txBody>
       </p:sp>
@@ -6569,7 +6729,7 @@
         <p:spPr>
           <a:xfrm>
             <a:off x="6416040" y="2286000"/>
-            <a:ext cx="2590800" cy="3383280"/>
+            <a:ext cx="2590800" cy="1477328"/>
           </a:xfrm>
           <a:prstGeom prst="rect">
             <a:avLst/>
@@ -6583,23 +6743,28 @@
           <a:lstStyle/>
           <a:p>
             <a:r>
-              <a:rPr>
+              <a:rPr lang="vi-VN">
                 <a:solidFill>
                   <a:srgbClr val="FFFFFF"/>
                 </a:solidFill>
               </a:rPr>
-              <a:t>• ATE estimate vẫn centered quanh benchmark trong scenario đã kiểm tra, nhưng variance/CI tăng đáng kể.</a:t>
-            </a:r>
-          </a:p>
-          <a:p>
-            <a:r>
-              <a:rPr>
+              <a:t>• Bias vẫn gần 0 trong randomized setting.</a:t>
+            </a:r>
+          </a:p>
+          <a:p>
+            <a:r>
+              <a:rPr lang="vi-VN">
                 <a:solidFill>
                   <a:srgbClr val="FFFFFF"/>
                 </a:solidFill>
               </a:rPr>
-              <a:t>• Imbalanced design cần cân nhắc power và sample size.</a:t>
-            </a:r>
+              <a:t>• 10/90 làm power thấp hơn; cần sample-size planning.</a:t>
+            </a:r>
+            <a:endParaRPr>
+              <a:solidFill>
+                <a:srgbClr val="FFFFFF"/>
+              </a:solidFill>
+            </a:endParaRPr>
           </a:p>
         </p:txBody>
       </p:sp>
@@ -6612,7 +6777,7 @@
 </file>
 
 <file path=ppt/slides/slide6.xml><?xml version="1.0" encoding="utf-8"?>
-<p:sld xmlns:a="http://schemas.openxmlformats.org/drawingml/2006/main" xmlns:p="http://schemas.openxmlformats.org/presentationml/2006/main" xmlns:r="http://schemas.openxmlformats.org/officeDocument/2006/relationships">
+<p:sld xmlns:a="http://schemas.openxmlformats.org/drawingml/2006/main" xmlns:r="http://schemas.openxmlformats.org/officeDocument/2006/relationships" xmlns:p="http://schemas.openxmlformats.org/presentationml/2006/main">
   <p:cSld>
     <p:bg>
       <p:bgPr>
@@ -6628,7 +6793,14 @@
         <p:cNvGrpSpPr/>
         <p:nvPr/>
       </p:nvGrpSpPr>
-      <p:grpSpPr/>
+      <p:grpSpPr>
+        <a:xfrm>
+          <a:off x="0" y="0"/>
+          <a:ext cx="0" cy="0"/>
+          <a:chOff x="0" y="0"/>
+          <a:chExt cx="0" cy="0"/>
+        </a:xfrm>
+      </p:grpSpPr>
       <p:sp>
         <p:nvSpPr>
           <p:cNvPr id="2" name="Rectangle 1"/>
@@ -6669,6 +6841,7 @@
           <a:lstStyle/>
           <a:p>
             <a:pPr algn="ctr"/>
+            <a:endParaRPr/>
           </a:p>
         </p:txBody>
       </p:sp>
@@ -6681,7 +6854,7 @@
         <p:spPr>
           <a:xfrm>
             <a:off x="640080" y="182880"/>
-            <a:ext cx="7772400" cy="731520"/>
+            <a:ext cx="7948586" cy="492443"/>
           </a:xfrm>
           <a:prstGeom prst="rect">
             <a:avLst/>
@@ -6703,13 +6876,18 @@
               </a:defRPr>
             </a:pPr>
             <a:r>
-              <a:rPr>
+              <a:rPr lang="en-US">
                 <a:solidFill>
                   <a:srgbClr val="FFFFFF"/>
                 </a:solidFill>
               </a:rPr>
-              <a:t>5. Bài test 4: Kháng Nhiễu (Noise)</a:t>
-            </a:r>
+              <a:t>5. Stress Test #4 - Noise làm tăng nhẹ độ bất định</a:t>
+            </a:r>
+            <a:endParaRPr>
+              <a:solidFill>
+                <a:srgbClr val="FFFFFF"/>
+              </a:solidFill>
+            </a:endParaRPr>
           </a:p>
         </p:txBody>
       </p:sp>
@@ -6722,7 +6900,7 @@
         <p:spPr>
           <a:xfrm>
             <a:off x="640080" y="731520"/>
-            <a:ext cx="7772400" cy="365760"/>
+            <a:ext cx="5337359" cy="292388"/>
           </a:xfrm>
           <a:prstGeom prst="rect">
             <a:avLst/>
@@ -6744,13 +6922,18 @@
               </a:defRPr>
             </a:pPr>
             <a:r>
-              <a:rPr>
+              <a:rPr lang="en-US">
                 <a:solidFill>
                   <a:srgbClr val="FFFFFF"/>
                 </a:solidFill>
               </a:rPr>
-              <a:t>Kiểm tra độ vững trước tác động ngoại cảnh</a:t>
-            </a:r>
+              <a:t>Cộng Gaussian noise SD=1 trên cùng sample và treatment assignment</a:t>
+            </a:r>
+            <a:endParaRPr>
+              <a:solidFill>
+                <a:srgbClr val="FFFFFF"/>
+              </a:solidFill>
+            </a:endParaRPr>
           </a:p>
         </p:txBody>
       </p:sp>
@@ -6794,6 +6977,7 @@
           <a:lstStyle/>
           <a:p>
             <a:pPr algn="ctr"/>
+            <a:endParaRPr/>
           </a:p>
         </p:txBody>
       </p:sp>
@@ -6837,6 +7021,7 @@
           <a:lstStyle/>
           <a:p>
             <a:pPr algn="ctr"/>
+            <a:endParaRPr/>
           </a:p>
         </p:txBody>
       </p:sp>
@@ -6921,6 +7106,7 @@
           <a:lstStyle/>
           <a:p>
             <a:pPr algn="ctr"/>
+            <a:endParaRPr/>
           </a:p>
         </p:txBody>
       </p:sp>
@@ -7046,6 +7232,7 @@
           <a:lstStyle/>
           <a:p>
             <a:pPr algn="ctr"/>
+            <a:endParaRPr/>
           </a:p>
         </p:txBody>
       </p:sp>
@@ -7089,6 +7276,7 @@
           <a:lstStyle/>
           <a:p>
             <a:pPr algn="ctr"/>
+            <a:endParaRPr/>
           </a:p>
         </p:txBody>
       </p:sp>
@@ -7142,7 +7330,7 @@
         <p:spPr>
           <a:xfrm>
             <a:off x="685800" y="2286000"/>
-            <a:ext cx="2590800" cy="3383280"/>
+            <a:ext cx="2590800" cy="1200329"/>
           </a:xfrm>
           <a:prstGeom prst="rect">
             <a:avLst/>
@@ -7156,23 +7344,28 @@
           <a:lstStyle/>
           <a:p>
             <a:r>
-              <a:rPr>
+              <a:rPr lang="pt-BR">
                 <a:solidFill>
                   <a:srgbClr val="FFFFFF"/>
                 </a:solidFill>
               </a:rPr>
-              <a:t>• Tiêm mean-zero Gaussian noise vào outcome như simplified stress scenario.</a:t>
-            </a:r>
-          </a:p>
-          <a:p>
-            <a:r>
-              <a:rPr>
+              <a:t>• 300 runs; n = 20.000; treatment/control 50/50.</a:t>
+            </a:r>
+          </a:p>
+          <a:p>
+            <a:r>
+              <a:rPr lang="pt-BR">
                 <a:solidFill>
                   <a:srgbClr val="FFFFFF"/>
                 </a:solidFill>
               </a:rPr>
-              <a:t>• Real-world shocks như thời tiết/lễ hội có thể là systematic factors.</a:t>
-            </a:r>
+              <a:t>• Cộng N(0,1) vào outcome quan sát.</a:t>
+            </a:r>
+            <a:endParaRPr>
+              <a:solidFill>
+                <a:srgbClr val="FFFFFF"/>
+              </a:solidFill>
+            </a:endParaRPr>
           </a:p>
         </p:txBody>
       </p:sp>
@@ -7216,6 +7409,7 @@
           <a:lstStyle/>
           <a:p>
             <a:pPr algn="ctr"/>
+            <a:endParaRPr/>
           </a:p>
         </p:txBody>
       </p:sp>
@@ -7259,6 +7453,7 @@
           <a:lstStyle/>
           <a:p>
             <a:pPr algn="ctr"/>
+            <a:endParaRPr/>
           </a:p>
         </p:txBody>
       </p:sp>
@@ -7312,7 +7507,7 @@
         <p:spPr>
           <a:xfrm>
             <a:off x="3550920" y="2286000"/>
-            <a:ext cx="2590800" cy="3383280"/>
+            <a:ext cx="2590800" cy="923330"/>
           </a:xfrm>
           <a:prstGeom prst="rect">
             <a:avLst/>
@@ -7326,23 +7521,28 @@
           <a:lstStyle/>
           <a:p>
             <a:r>
-              <a:rPr>
+              <a:rPr lang="en-US">
                 <a:solidFill>
                   <a:srgbClr val="FFFFFF"/>
                 </a:solidFill>
               </a:rPr>
-              <a:t>• Noise làm tăng biến động outcome.</a:t>
-            </a:r>
-          </a:p>
-          <a:p>
-            <a:r>
-              <a:rPr>
+              <a:t>• Mean ATE giữ ở 0,929.</a:t>
+            </a:r>
+          </a:p>
+          <a:p>
+            <a:r>
+              <a:rPr lang="en-US">
                 <a:solidFill>
                   <a:srgbClr val="FFFFFF"/>
                 </a:solidFill>
               </a:rPr>
-              <a:t>• ATE difference vẫn tương đối ổn trong scenario đã kiểm tra, nhưng uncertainty tăng.</a:t>
-            </a:r>
+              <a:t>• Estimator SD tăng nhẹ: 0,091 -&gt; 0,092.</a:t>
+            </a:r>
+            <a:endParaRPr>
+              <a:solidFill>
+                <a:srgbClr val="FFFFFF"/>
+              </a:solidFill>
+            </a:endParaRPr>
           </a:p>
         </p:txBody>
       </p:sp>
@@ -7386,6 +7586,7 @@
           <a:lstStyle/>
           <a:p>
             <a:pPr algn="ctr"/>
+            <a:endParaRPr/>
           </a:p>
         </p:txBody>
       </p:sp>
@@ -7429,6 +7630,7 @@
           <a:lstStyle/>
           <a:p>
             <a:pPr algn="ctr"/>
+            <a:endParaRPr/>
           </a:p>
         </p:txBody>
       </p:sp>
@@ -7482,7 +7684,7 @@
         <p:spPr>
           <a:xfrm>
             <a:off x="6416040" y="2286000"/>
-            <a:ext cx="2590800" cy="3383280"/>
+            <a:ext cx="2590800" cy="1754326"/>
           </a:xfrm>
           <a:prstGeom prst="rect">
             <a:avLst/>
@@ -7496,23 +7698,28 @@
           <a:lstStyle/>
           <a:p>
             <a:r>
-              <a:rPr>
+              <a:rPr lang="vi-VN">
                 <a:solidFill>
                   <a:srgbClr val="FFFFFF"/>
                 </a:solidFill>
               </a:rPr>
-              <a:t>• Với mean-zero noise độc lập với treatment, randomization giúp cân bằng noise theo kỳ vọng.</a:t>
-            </a:r>
-          </a:p>
-          <a:p>
-            <a:r>
-              <a:rPr>
+              <a:t>• Mean-zero noise không tạo directional bias theo kỳ vọng.</a:t>
+            </a:r>
+          </a:p>
+          <a:p>
+            <a:r>
+              <a:rPr lang="vi-VN">
                 <a:solidFill>
                   <a:srgbClr val="FFFFFF"/>
                 </a:solidFill>
               </a:rPr>
-              <a:t>• Noise không biến mất hoàn toàn; nó làm tăng variance và CI.</a:t>
-            </a:r>
+              <a:t>• Chưa đại diện cho systematic shocks hay distribution shift.</a:t>
+            </a:r>
+            <a:endParaRPr>
+              <a:solidFill>
+                <a:srgbClr val="FFFFFF"/>
+              </a:solidFill>
+            </a:endParaRPr>
           </a:p>
         </p:txBody>
       </p:sp>
@@ -7525,7 +7732,7 @@
 </file>
 
 <file path=ppt/slides/slide7.xml><?xml version="1.0" encoding="utf-8"?>
-<p:sld xmlns:a="http://schemas.openxmlformats.org/drawingml/2006/main" xmlns:p="http://schemas.openxmlformats.org/presentationml/2006/main" xmlns:r="http://schemas.openxmlformats.org/officeDocument/2006/relationships">
+<p:sld xmlns:a="http://schemas.openxmlformats.org/drawingml/2006/main" xmlns:r="http://schemas.openxmlformats.org/officeDocument/2006/relationships" xmlns:p="http://schemas.openxmlformats.org/presentationml/2006/main">
   <p:cSld>
     <p:bg>
       <p:bgPr>
@@ -7541,7 +7748,14 @@
         <p:cNvGrpSpPr/>
         <p:nvPr/>
       </p:nvGrpSpPr>
-      <p:grpSpPr/>
+      <p:grpSpPr>
+        <a:xfrm>
+          <a:off x="0" y="0"/>
+          <a:ext cx="0" cy="0"/>
+          <a:chOff x="0" y="0"/>
+          <a:chExt cx="0" cy="0"/>
+        </a:xfrm>
+      </p:grpSpPr>
       <p:sp>
         <p:nvSpPr>
           <p:cNvPr id="2" name="Rectangle 1"/>
@@ -7582,6 +7796,7 @@
           <a:lstStyle/>
           <a:p>
             <a:pPr algn="ctr"/>
+            <a:endParaRPr/>
           </a:p>
         </p:txBody>
       </p:sp>
@@ -7691,6 +7906,7 @@
           <a:lstStyle/>
           <a:p>
             <a:pPr algn="ctr"/>
+            <a:endParaRPr/>
           </a:p>
         </p:txBody>
       </p:sp>
@@ -7734,6 +7950,7 @@
           <a:lstStyle/>
           <a:p>
             <a:pPr algn="ctr"/>
+            <a:endParaRPr/>
           </a:p>
         </p:txBody>
       </p:sp>
@@ -7818,6 +8035,7 @@
           <a:lstStyle/>
           <a:p>
             <a:pPr algn="ctr"/>
+            <a:endParaRPr/>
           </a:p>
         </p:txBody>
       </p:sp>
@@ -7943,6 +8161,7 @@
           <a:lstStyle/>
           <a:p>
             <a:pPr algn="ctr"/>
+            <a:endParaRPr/>
           </a:p>
         </p:txBody>
       </p:sp>
@@ -7986,6 +8205,7 @@
           <a:lstStyle/>
           <a:p>
             <a:pPr algn="ctr"/>
+            <a:endParaRPr/>
           </a:p>
         </p:txBody>
       </p:sp>
@@ -8039,7 +8259,7 @@
         <p:spPr>
           <a:xfrm>
             <a:off x="685800" y="2286000"/>
-            <a:ext cx="3931920" cy="3383280"/>
+            <a:ext cx="3931920" cy="1200329"/>
           </a:xfrm>
           <a:prstGeom prst="rect">
             <a:avLst/>
@@ -8053,13 +8273,28 @@
           <a:lstStyle/>
           <a:p>
             <a:r>
-              <a:rPr>
+              <a:rPr lang="en-US">
                 <a:solidFill>
                   <a:srgbClr val="FFFFFF"/>
                 </a:solidFill>
               </a:rPr>
-              <a:t>• Không phát hiện failure nghiêm trọng trong 4 synthetic stress scenarios đã kiểm tra.</a:t>
-            </a:r>
+              <a:t>• Không thấy directional bias đáng kể trong bốn tested scenarios.</a:t>
+            </a:r>
+          </a:p>
+          <a:p>
+            <a:r>
+              <a:rPr lang="en-US">
+                <a:solidFill>
+                  <a:srgbClr val="FFFFFF"/>
+                </a:solidFill>
+              </a:rPr>
+              <a:t>• 10/90 làm uncertainty tăng rõ; noise SD=1 chỉ tăng nhẹ.</a:t>
+            </a:r>
+            <a:endParaRPr>
+              <a:solidFill>
+                <a:srgbClr val="FFFFFF"/>
+              </a:solidFill>
+            </a:endParaRPr>
           </a:p>
         </p:txBody>
       </p:sp>
@@ -8103,6 +8338,7 @@
           <a:lstStyle/>
           <a:p>
             <a:pPr algn="ctr"/>
+            <a:endParaRPr/>
           </a:p>
         </p:txBody>
       </p:sp>
@@ -8146,6 +8382,7 @@
           <a:lstStyle/>
           <a:p>
             <a:pPr algn="ctr"/>
+            <a:endParaRPr/>
           </a:p>
         </p:txBody>
       </p:sp>
@@ -8199,7 +8436,7 @@
         <p:spPr>
           <a:xfrm>
             <a:off x="4892040" y="2286000"/>
-            <a:ext cx="3931920" cy="3383280"/>
+            <a:ext cx="3931920" cy="1200329"/>
           </a:xfrm>
           <a:prstGeom prst="rect">
             <a:avLst/>
@@ -8213,23 +8450,28 @@
           <a:lstStyle/>
           <a:p>
             <a:r>
-              <a:rPr>
+              <a:rPr lang="vi-VN">
                 <a:solidFill>
                   <a:srgbClr val="FFFFFF"/>
                 </a:solidFill>
               </a:rPr>
-              <a:t>• Stress tests chưa bao phủ production risks như logging/exposure failure, interference và distribution shift.</a:t>
-            </a:r>
-          </a:p>
-          <a:p>
-            <a:r>
-              <a:rPr>
+              <a:t>• Chưa kiểm tra logging failure, non-compliance, interference hay drift.</a:t>
+            </a:r>
+          </a:p>
+          <a:p>
+            <a:r>
+              <a:rPr lang="vi-VN">
                 <a:solidFill>
                   <a:srgbClr val="FFFFFF"/>
                 </a:solidFill>
               </a:rPr>
-              <a:t>• Real-world use cần randomized production experiment và monitoring.</a:t>
-            </a:r>
+              <a:t>• Bước tiếp theo: experiment contract và randomized pilot.</a:t>
+            </a:r>
+            <a:endParaRPr>
+              <a:solidFill>
+                <a:srgbClr val="FFFFFF"/>
+              </a:solidFill>
+            </a:endParaRPr>
           </a:p>
         </p:txBody>
       </p:sp>
